--- a/examples/recreations/08_Dropbox_a_Holy_Child__Experiment_14_Atoms_and_Molecules/out_mat2ppt.pptx
+++ b/examples/recreations/08_Dropbox_a_Holy_Child__Experiment_14_Atoms_and_Molecules/out_mat2ppt.pptx
@@ -3773,6 +3773,84 @@
           </a:p>
         </p:txBody>
       </p:sp>
+      <p:sp>
+        <p:nvSpPr>
+          <p:cNvPr id="20" name="Rectangle 19"/>
+          <p:cNvSpPr/>
+          <p:nvPr/>
+        </p:nvSpPr>
+        <p:spPr>
+          <a:xfrm>
+            <a:off x="838200" y="365125"/>
+            <a:ext cx="10515600" cy="1325563"/>
+          </a:xfrm>
+          <a:prstGeom prst="rect">
+            <a:avLst/>
+          </a:prstGeom>
+        </p:spPr>
+        <p:style>
+          <a:lnRef idx="1">
+            <a:schemeClr val="accent1"/>
+          </a:lnRef>
+          <a:fillRef idx="3">
+            <a:schemeClr val="accent1"/>
+          </a:fillRef>
+          <a:effectRef idx="2">
+            <a:schemeClr val="accent1"/>
+          </a:effectRef>
+          <a:fontRef idx="minor">
+            <a:schemeClr val="lt1"/>
+          </a:fontRef>
+        </p:style>
+        <p:txBody>
+          <a:bodyPr rtlCol="0" anchor="ctr"/>
+          <a:lstStyle/>
+          <a:p>
+            <a:r>
+              <a:t>1</a:t>
+            </a:r>
+          </a:p>
+        </p:txBody>
+      </p:sp>
+      <p:sp>
+        <p:nvSpPr>
+          <p:cNvPr id="21" name="Rectangle 20"/>
+          <p:cNvSpPr/>
+          <p:nvPr/>
+        </p:nvSpPr>
+        <p:spPr>
+          <a:xfrm>
+            <a:off x="838200" y="365125"/>
+            <a:ext cx="10515600" cy="1325563"/>
+          </a:xfrm>
+          <a:prstGeom prst="rect">
+            <a:avLst/>
+          </a:prstGeom>
+        </p:spPr>
+        <p:style>
+          <a:lnRef idx="1">
+            <a:schemeClr val="accent1"/>
+          </a:lnRef>
+          <a:fillRef idx="3">
+            <a:schemeClr val="accent1"/>
+          </a:fillRef>
+          <a:effectRef idx="2">
+            <a:schemeClr val="accent1"/>
+          </a:effectRef>
+          <a:fontRef idx="minor">
+            <a:schemeClr val="lt1"/>
+          </a:fontRef>
+        </p:style>
+        <p:txBody>
+          <a:bodyPr rtlCol="0" anchor="ctr"/>
+          <a:lstStyle/>
+          <a:p>
+            <a:r>
+              <a:t>Atoms and Molecules Session 14</a:t>
+            </a:r>
+          </a:p>
+        </p:txBody>
+      </p:sp>
     </p:spTree>
   </p:cSld>
   <p:clrMapOvr>
@@ -3830,6 +3908,84 @@
           </a:p>
         </p:txBody>
       </p:sp>
+      <p:sp>
+        <p:nvSpPr>
+          <p:cNvPr id="3" name="Rectangle 2"/>
+          <p:cNvSpPr/>
+          <p:nvPr/>
+        </p:nvSpPr>
+        <p:spPr>
+          <a:xfrm>
+            <a:off x="838200" y="365125"/>
+            <a:ext cx="10515600" cy="1325563"/>
+          </a:xfrm>
+          <a:prstGeom prst="rect">
+            <a:avLst/>
+          </a:prstGeom>
+        </p:spPr>
+        <p:style>
+          <a:lnRef idx="1">
+            <a:schemeClr val="accent1"/>
+          </a:lnRef>
+          <a:fillRef idx="3">
+            <a:schemeClr val="accent1"/>
+          </a:fillRef>
+          <a:effectRef idx="2">
+            <a:schemeClr val="accent1"/>
+          </a:effectRef>
+          <a:fontRef idx="minor">
+            <a:schemeClr val="lt1"/>
+          </a:fontRef>
+        </p:style>
+        <p:txBody>
+          <a:bodyPr rtlCol="0" anchor="ctr"/>
+          <a:lstStyle/>
+          <a:p>
+            <a:r>
+              <a:t>10</a:t>
+            </a:r>
+          </a:p>
+        </p:txBody>
+      </p:sp>
+      <p:sp>
+        <p:nvSpPr>
+          <p:cNvPr id="4" name="Rectangle 3"/>
+          <p:cNvSpPr/>
+          <p:nvPr/>
+        </p:nvSpPr>
+        <p:spPr>
+          <a:xfrm>
+            <a:off x="838200" y="365125"/>
+            <a:ext cx="10515600" cy="1325563"/>
+          </a:xfrm>
+          <a:prstGeom prst="rect">
+            <a:avLst/>
+          </a:prstGeom>
+        </p:spPr>
+        <p:style>
+          <a:lnRef idx="1">
+            <a:schemeClr val="accent1"/>
+          </a:lnRef>
+          <a:fillRef idx="3">
+            <a:schemeClr val="accent1"/>
+          </a:fillRef>
+          <a:effectRef idx="2">
+            <a:schemeClr val="accent1"/>
+          </a:effectRef>
+          <a:fontRef idx="minor">
+            <a:schemeClr val="lt1"/>
+          </a:fontRef>
+        </p:style>
+        <p:txBody>
+          <a:bodyPr rtlCol="0" anchor="ctr"/>
+          <a:lstStyle/>
+          <a:p>
+            <a:r>
+              <a:t>Atoms and Molecules Session 14</a:t>
+            </a:r>
+          </a:p>
+        </p:txBody>
+      </p:sp>
     </p:spTree>
   </p:cSld>
   <p:clrMapOvr>
@@ -3848,9 +4004,126 @@
         <p:nvPr/>
       </p:nvGrpSpPr>
       <p:grpSpPr/>
+      <p:sp>
+        <p:nvSpPr>
+          <p:cNvPr id="2" name="Rectangle 1"/>
+          <p:cNvSpPr/>
+          <p:nvPr/>
+        </p:nvSpPr>
+        <p:spPr>
+          <a:xfrm>
+            <a:off x="838200" y="365125"/>
+            <a:ext cx="10515600" cy="1325563"/>
+          </a:xfrm>
+          <a:prstGeom prst="rect">
+            <a:avLst/>
+          </a:prstGeom>
+        </p:spPr>
+        <p:style>
+          <a:lnRef idx="1">
+            <a:schemeClr val="accent1"/>
+          </a:lnRef>
+          <a:fillRef idx="3">
+            <a:schemeClr val="accent1"/>
+          </a:fillRef>
+          <a:effectRef idx="2">
+            <a:schemeClr val="accent1"/>
+          </a:effectRef>
+          <a:fontRef idx="minor">
+            <a:schemeClr val="lt1"/>
+          </a:fontRef>
+        </p:style>
+        <p:txBody>
+          <a:bodyPr rtlCol="0" anchor="ctr"/>
+          <a:lstStyle/>
+          <a:p>
+            <a:r>
+              <a:t>Some Beautiful Crystals</a:t>
+            </a:r>
+          </a:p>
+        </p:txBody>
+      </p:sp>
+      <p:sp>
+        <p:nvSpPr>
+          <p:cNvPr id="3" name="Rectangle 2"/>
+          <p:cNvSpPr/>
+          <p:nvPr/>
+        </p:nvSpPr>
+        <p:spPr>
+          <a:xfrm>
+            <a:off x="838200" y="365125"/>
+            <a:ext cx="10515600" cy="1325563"/>
+          </a:xfrm>
+          <a:prstGeom prst="rect">
+            <a:avLst/>
+          </a:prstGeom>
+        </p:spPr>
+        <p:style>
+          <a:lnRef idx="1">
+            <a:schemeClr val="accent1"/>
+          </a:lnRef>
+          <a:fillRef idx="3">
+            <a:schemeClr val="accent1"/>
+          </a:fillRef>
+          <a:effectRef idx="2">
+            <a:schemeClr val="accent1"/>
+          </a:effectRef>
+          <a:fontRef idx="minor">
+            <a:schemeClr val="lt1"/>
+          </a:fontRef>
+        </p:style>
+        <p:txBody>
+          <a:bodyPr rtlCol="0" anchor="ctr"/>
+          <a:lstStyle/>
+          <a:p>
+            <a:r>
+              <a:t>Atoms and Molecules Session 14</a:t>
+            </a:r>
+          </a:p>
+        </p:txBody>
+      </p:sp>
+      <p:sp>
+        <p:nvSpPr>
+          <p:cNvPr id="4" name="Rectangle 3"/>
+          <p:cNvSpPr/>
+          <p:nvPr/>
+        </p:nvSpPr>
+        <p:spPr>
+          <a:xfrm>
+            <a:off x="838200" y="365125"/>
+            <a:ext cx="10515600" cy="1325563"/>
+          </a:xfrm>
+          <a:prstGeom prst="rect">
+            <a:avLst/>
+          </a:prstGeom>
+        </p:spPr>
+        <p:style>
+          <a:lnRef idx="1">
+            <a:schemeClr val="accent1"/>
+          </a:lnRef>
+          <a:fillRef idx="3">
+            <a:schemeClr val="accent1"/>
+          </a:fillRef>
+          <a:effectRef idx="2">
+            <a:schemeClr val="accent1"/>
+          </a:effectRef>
+          <a:fontRef idx="minor">
+            <a:schemeClr val="lt1"/>
+          </a:fontRef>
+        </p:style>
+        <p:txBody>
+          <a:bodyPr rtlCol="0" anchor="ctr"/>
+          <a:lstStyle/>
+          <a:p>
+            <a:r>
+              <a:t>11</a:t>
+            </a:r>
+          </a:p>
+        </p:txBody>
+      </p:sp>
       <p:pic>
         <p:nvPicPr>
-          <p:cNvPr id="2" name="Picture 1" descr="image7.jpeg"/>
+          <p:cNvPr id="5" name="Picture 4" descr="image7.jpeg"/>
           <p:cNvPicPr>
             <a:picLocks noChangeAspect="1"/>
           </p:cNvPicPr>
@@ -3874,7 +4147,7 @@
       </p:pic>
       <p:pic>
         <p:nvPicPr>
-          <p:cNvPr id="3" name="Picture 2" descr="image8.png"/>
+          <p:cNvPr id="6" name="Picture 5" descr="image8.png"/>
           <p:cNvPicPr>
             <a:picLocks noChangeAspect="1"/>
           </p:cNvPicPr>
@@ -3898,7 +4171,7 @@
       </p:pic>
       <p:pic>
         <p:nvPicPr>
-          <p:cNvPr id="4" name="Picture 3" descr="image9.jpeg"/>
+          <p:cNvPr id="7" name="Picture 6" descr="image9.jpeg"/>
           <p:cNvPicPr>
             <a:picLocks noChangeAspect="1"/>
           </p:cNvPicPr>
@@ -3922,7 +4195,7 @@
       </p:pic>
       <p:sp>
         <p:nvSpPr>
-          <p:cNvPr id="5" name="Rectangle 4"/>
+          <p:cNvPr id="8" name="Rectangle 7"/>
           <p:cNvSpPr/>
           <p:nvPr/>
         </p:nvSpPr>
@@ -3977,9 +4250,126 @@
         <p:nvPr/>
       </p:nvGrpSpPr>
       <p:grpSpPr/>
+      <p:sp>
+        <p:nvSpPr>
+          <p:cNvPr id="2" name="Rectangle 1"/>
+          <p:cNvSpPr/>
+          <p:nvPr/>
+        </p:nvSpPr>
+        <p:spPr>
+          <a:xfrm>
+            <a:off x="838200" y="365125"/>
+            <a:ext cx="10515600" cy="1325563"/>
+          </a:xfrm>
+          <a:prstGeom prst="rect">
+            <a:avLst/>
+          </a:prstGeom>
+        </p:spPr>
+        <p:style>
+          <a:lnRef idx="1">
+            <a:schemeClr val="accent1"/>
+          </a:lnRef>
+          <a:fillRef idx="3">
+            <a:schemeClr val="accent1"/>
+          </a:fillRef>
+          <a:effectRef idx="2">
+            <a:schemeClr val="accent1"/>
+          </a:effectRef>
+          <a:fontRef idx="minor">
+            <a:schemeClr val="lt1"/>
+          </a:fontRef>
+        </p:style>
+        <p:txBody>
+          <a:bodyPr rtlCol="0" anchor="ctr"/>
+          <a:lstStyle/>
+          <a:p>
+            <a:r>
+              <a:t>More Crystals!</a:t>
+            </a:r>
+          </a:p>
+        </p:txBody>
+      </p:sp>
+      <p:sp>
+        <p:nvSpPr>
+          <p:cNvPr id="3" name="Rectangle 2"/>
+          <p:cNvSpPr/>
+          <p:nvPr/>
+        </p:nvSpPr>
+        <p:spPr>
+          <a:xfrm>
+            <a:off x="838200" y="365125"/>
+            <a:ext cx="10515600" cy="1325563"/>
+          </a:xfrm>
+          <a:prstGeom prst="rect">
+            <a:avLst/>
+          </a:prstGeom>
+        </p:spPr>
+        <p:style>
+          <a:lnRef idx="1">
+            <a:schemeClr val="accent1"/>
+          </a:lnRef>
+          <a:fillRef idx="3">
+            <a:schemeClr val="accent1"/>
+          </a:fillRef>
+          <a:effectRef idx="2">
+            <a:schemeClr val="accent1"/>
+          </a:effectRef>
+          <a:fontRef idx="minor">
+            <a:schemeClr val="lt1"/>
+          </a:fontRef>
+        </p:style>
+        <p:txBody>
+          <a:bodyPr rtlCol="0" anchor="ctr"/>
+          <a:lstStyle/>
+          <a:p>
+            <a:r>
+              <a:t>Atoms and Molecules Session 14</a:t>
+            </a:r>
+          </a:p>
+        </p:txBody>
+      </p:sp>
+      <p:sp>
+        <p:nvSpPr>
+          <p:cNvPr id="4" name="Rectangle 3"/>
+          <p:cNvSpPr/>
+          <p:nvPr/>
+        </p:nvSpPr>
+        <p:spPr>
+          <a:xfrm>
+            <a:off x="838200" y="365125"/>
+            <a:ext cx="10515600" cy="1325563"/>
+          </a:xfrm>
+          <a:prstGeom prst="rect">
+            <a:avLst/>
+          </a:prstGeom>
+        </p:spPr>
+        <p:style>
+          <a:lnRef idx="1">
+            <a:schemeClr val="accent1"/>
+          </a:lnRef>
+          <a:fillRef idx="3">
+            <a:schemeClr val="accent1"/>
+          </a:fillRef>
+          <a:effectRef idx="2">
+            <a:schemeClr val="accent1"/>
+          </a:effectRef>
+          <a:fontRef idx="minor">
+            <a:schemeClr val="lt1"/>
+          </a:fontRef>
+        </p:style>
+        <p:txBody>
+          <a:bodyPr rtlCol="0" anchor="ctr"/>
+          <a:lstStyle/>
+          <a:p>
+            <a:r>
+              <a:t>12</a:t>
+            </a:r>
+          </a:p>
+        </p:txBody>
+      </p:sp>
       <p:pic>
         <p:nvPicPr>
-          <p:cNvPr id="2" name="Picture 1" descr="image10.jpeg"/>
+          <p:cNvPr id="5" name="Picture 4" descr="image10.jpeg"/>
           <p:cNvPicPr>
             <a:picLocks noChangeAspect="1"/>
           </p:cNvPicPr>
@@ -4003,7 +4393,7 @@
       </p:pic>
       <p:sp>
         <p:nvSpPr>
-          <p:cNvPr id="3" name="Rectangle 2"/>
+          <p:cNvPr id="6" name="Rectangle 5"/>
           <p:cNvSpPr/>
           <p:nvPr/>
         </p:nvSpPr>
@@ -4042,7 +4432,7 @@
       </p:sp>
       <p:pic>
         <p:nvPicPr>
-          <p:cNvPr id="4" name="Picture 3" descr="image11.jpeg"/>
+          <p:cNvPr id="7" name="Picture 6" descr="image11.jpeg"/>
           <p:cNvPicPr>
             <a:picLocks noChangeAspect="1"/>
           </p:cNvPicPr>
@@ -4066,7 +4456,7 @@
       </p:pic>
       <p:sp>
         <p:nvSpPr>
-          <p:cNvPr id="5" name="Rectangle 4"/>
+          <p:cNvPr id="8" name="Rectangle 7"/>
           <p:cNvSpPr/>
           <p:nvPr/>
         </p:nvSpPr>
@@ -4105,7 +4495,7 @@
       </p:sp>
       <p:pic>
         <p:nvPicPr>
-          <p:cNvPr id="6" name="Picture 5" descr="image12.jpeg"/>
+          <p:cNvPr id="9" name="Picture 8" descr="image12.jpeg"/>
           <p:cNvPicPr>
             <a:picLocks noChangeAspect="1"/>
           </p:cNvPicPr>
@@ -4129,7 +4519,7 @@
       </p:pic>
       <p:sp>
         <p:nvSpPr>
-          <p:cNvPr id="7" name="Rectangle 6"/>
+          <p:cNvPr id="10" name="Rectangle 9"/>
           <p:cNvSpPr/>
           <p:nvPr/>
         </p:nvSpPr>
@@ -4184,9 +4574,126 @@
         <p:nvPr/>
       </p:nvGrpSpPr>
       <p:grpSpPr/>
+      <p:sp>
+        <p:nvSpPr>
+          <p:cNvPr id="2" name="Rectangle 1"/>
+          <p:cNvSpPr/>
+          <p:nvPr/>
+        </p:nvSpPr>
+        <p:spPr>
+          <a:xfrm>
+            <a:off x="838200" y="365125"/>
+            <a:ext cx="10515600" cy="1325563"/>
+          </a:xfrm>
+          <a:prstGeom prst="rect">
+            <a:avLst/>
+          </a:prstGeom>
+        </p:spPr>
+        <p:style>
+          <a:lnRef idx="1">
+            <a:schemeClr val="accent1"/>
+          </a:lnRef>
+          <a:fillRef idx="3">
+            <a:schemeClr val="accent1"/>
+          </a:fillRef>
+          <a:effectRef idx="2">
+            <a:schemeClr val="accent1"/>
+          </a:effectRef>
+          <a:fontRef idx="minor">
+            <a:schemeClr val="lt1"/>
+          </a:fontRef>
+        </p:style>
+        <p:txBody>
+          <a:bodyPr rtlCol="0" anchor="ctr"/>
+          <a:lstStyle/>
+          <a:p>
+            <a:r>
+              <a:t>Cave of Crystals, Mexico (Gypsum)</a:t>
+            </a:r>
+          </a:p>
+        </p:txBody>
+      </p:sp>
+      <p:sp>
+        <p:nvSpPr>
+          <p:cNvPr id="3" name="Rectangle 2"/>
+          <p:cNvSpPr/>
+          <p:nvPr/>
+        </p:nvSpPr>
+        <p:spPr>
+          <a:xfrm>
+            <a:off x="838200" y="365125"/>
+            <a:ext cx="10515600" cy="1325563"/>
+          </a:xfrm>
+          <a:prstGeom prst="rect">
+            <a:avLst/>
+          </a:prstGeom>
+        </p:spPr>
+        <p:style>
+          <a:lnRef idx="1">
+            <a:schemeClr val="accent1"/>
+          </a:lnRef>
+          <a:fillRef idx="3">
+            <a:schemeClr val="accent1"/>
+          </a:fillRef>
+          <a:effectRef idx="2">
+            <a:schemeClr val="accent1"/>
+          </a:effectRef>
+          <a:fontRef idx="minor">
+            <a:schemeClr val="lt1"/>
+          </a:fontRef>
+        </p:style>
+        <p:txBody>
+          <a:bodyPr rtlCol="0" anchor="ctr"/>
+          <a:lstStyle/>
+          <a:p>
+            <a:r>
+              <a:t>Atoms and Molecules Session 14</a:t>
+            </a:r>
+          </a:p>
+        </p:txBody>
+      </p:sp>
+      <p:sp>
+        <p:nvSpPr>
+          <p:cNvPr id="4" name="Rectangle 3"/>
+          <p:cNvSpPr/>
+          <p:nvPr/>
+        </p:nvSpPr>
+        <p:spPr>
+          <a:xfrm>
+            <a:off x="838200" y="365125"/>
+            <a:ext cx="10515600" cy="1325563"/>
+          </a:xfrm>
+          <a:prstGeom prst="rect">
+            <a:avLst/>
+          </a:prstGeom>
+        </p:spPr>
+        <p:style>
+          <a:lnRef idx="1">
+            <a:schemeClr val="accent1"/>
+          </a:lnRef>
+          <a:fillRef idx="3">
+            <a:schemeClr val="accent1"/>
+          </a:fillRef>
+          <a:effectRef idx="2">
+            <a:schemeClr val="accent1"/>
+          </a:effectRef>
+          <a:fontRef idx="minor">
+            <a:schemeClr val="lt1"/>
+          </a:fontRef>
+        </p:style>
+        <p:txBody>
+          <a:bodyPr rtlCol="0" anchor="ctr"/>
+          <a:lstStyle/>
+          <a:p>
+            <a:r>
+              <a:t>13</a:t>
+            </a:r>
+          </a:p>
+        </p:txBody>
+      </p:sp>
       <p:pic>
         <p:nvPicPr>
-          <p:cNvPr id="2" name="Picture 1" descr="image13.jpeg"/>
+          <p:cNvPr id="5" name="Picture 4" descr="image13.jpeg"/>
           <p:cNvPicPr>
             <a:picLocks noChangeAspect="1"/>
           </p:cNvPicPr>
@@ -4226,6 +4733,162 @@
         <p:nvPr/>
       </p:nvGrpSpPr>
       <p:grpSpPr/>
+      <p:sp>
+        <p:nvSpPr>
+          <p:cNvPr id="2" name="Rectangle 1"/>
+          <p:cNvSpPr/>
+          <p:nvPr/>
+        </p:nvSpPr>
+        <p:spPr>
+          <a:xfrm>
+            <a:off x="838200" y="365125"/>
+            <a:ext cx="10515600" cy="1325563"/>
+          </a:xfrm>
+          <a:prstGeom prst="rect">
+            <a:avLst/>
+          </a:prstGeom>
+        </p:spPr>
+        <p:style>
+          <a:lnRef idx="1">
+            <a:schemeClr val="accent1"/>
+          </a:lnRef>
+          <a:fillRef idx="3">
+            <a:schemeClr val="accent1"/>
+          </a:fillRef>
+          <a:effectRef idx="2">
+            <a:schemeClr val="accent1"/>
+          </a:effectRef>
+          <a:fontRef idx="minor">
+            <a:schemeClr val="lt1"/>
+          </a:fontRef>
+        </p:style>
+        <p:txBody>
+          <a:bodyPr rtlCol="0" anchor="ctr"/>
+          <a:lstStyle/>
+          <a:p>
+            <a:r>
+              <a:t>So, What are Crystals?</a:t>
+            </a:r>
+          </a:p>
+        </p:txBody>
+      </p:sp>
+      <p:sp>
+        <p:nvSpPr>
+          <p:cNvPr id="3" name="Rectangle 2"/>
+          <p:cNvSpPr/>
+          <p:nvPr/>
+        </p:nvSpPr>
+        <p:spPr>
+          <a:xfrm>
+            <a:off x="838200" y="365125"/>
+            <a:ext cx="10515600" cy="1325563"/>
+          </a:xfrm>
+          <a:prstGeom prst="rect">
+            <a:avLst/>
+          </a:prstGeom>
+        </p:spPr>
+        <p:style>
+          <a:lnRef idx="1">
+            <a:schemeClr val="accent1"/>
+          </a:lnRef>
+          <a:fillRef idx="3">
+            <a:schemeClr val="accent1"/>
+          </a:fillRef>
+          <a:effectRef idx="2">
+            <a:schemeClr val="accent1"/>
+          </a:effectRef>
+          <a:fontRef idx="minor">
+            <a:schemeClr val="lt1"/>
+          </a:fontRef>
+        </p:style>
+        <p:txBody>
+          <a:bodyPr rtlCol="0" anchor="ctr"/>
+          <a:lstStyle/>
+          <a:p>
+            <a:r>
+              <a:t>Crystals are solids.They have regular geometric shapes.They have faces, or facets that meet at sharp angles.They are mostly found in rocks (although there are ice crystals too).They are orderly arrangements of a single kind of atom or molecule.</a:t>
+            </a:r>
+          </a:p>
+        </p:txBody>
+      </p:sp>
+      <p:sp>
+        <p:nvSpPr>
+          <p:cNvPr id="4" name="Rectangle 3"/>
+          <p:cNvSpPr/>
+          <p:nvPr/>
+        </p:nvSpPr>
+        <p:spPr>
+          <a:xfrm>
+            <a:off x="838200" y="365125"/>
+            <a:ext cx="10515600" cy="1325563"/>
+          </a:xfrm>
+          <a:prstGeom prst="rect">
+            <a:avLst/>
+          </a:prstGeom>
+        </p:spPr>
+        <p:style>
+          <a:lnRef idx="1">
+            <a:schemeClr val="accent1"/>
+          </a:lnRef>
+          <a:fillRef idx="3">
+            <a:schemeClr val="accent1"/>
+          </a:fillRef>
+          <a:effectRef idx="2">
+            <a:schemeClr val="accent1"/>
+          </a:effectRef>
+          <a:fontRef idx="minor">
+            <a:schemeClr val="lt1"/>
+          </a:fontRef>
+        </p:style>
+        <p:txBody>
+          <a:bodyPr rtlCol="0" anchor="ctr"/>
+          <a:lstStyle/>
+          <a:p>
+            <a:r>
+              <a:t>Atoms and Molecules Session 14</a:t>
+            </a:r>
+          </a:p>
+        </p:txBody>
+      </p:sp>
+      <p:sp>
+        <p:nvSpPr>
+          <p:cNvPr id="5" name="Rectangle 4"/>
+          <p:cNvSpPr/>
+          <p:nvPr/>
+        </p:nvSpPr>
+        <p:spPr>
+          <a:xfrm>
+            <a:off x="838200" y="365125"/>
+            <a:ext cx="10515600" cy="1325563"/>
+          </a:xfrm>
+          <a:prstGeom prst="rect">
+            <a:avLst/>
+          </a:prstGeom>
+        </p:spPr>
+        <p:style>
+          <a:lnRef idx="1">
+            <a:schemeClr val="accent1"/>
+          </a:lnRef>
+          <a:fillRef idx="3">
+            <a:schemeClr val="accent1"/>
+          </a:fillRef>
+          <a:effectRef idx="2">
+            <a:schemeClr val="accent1"/>
+          </a:effectRef>
+          <a:fontRef idx="minor">
+            <a:schemeClr val="lt1"/>
+          </a:fontRef>
+        </p:style>
+        <p:txBody>
+          <a:bodyPr rtlCol="0" anchor="ctr"/>
+          <a:lstStyle/>
+          <a:p>
+            <a:r>
+              <a:t>14</a:t>
+            </a:r>
+          </a:p>
+        </p:txBody>
+      </p:sp>
     </p:spTree>
   </p:cSld>
   <p:clrMapOvr>
@@ -4244,9 +4907,126 @@
         <p:nvPr/>
       </p:nvGrpSpPr>
       <p:grpSpPr/>
+      <p:sp>
+        <p:nvSpPr>
+          <p:cNvPr id="2" name="Rectangle 1"/>
+          <p:cNvSpPr/>
+          <p:nvPr/>
+        </p:nvSpPr>
+        <p:spPr>
+          <a:xfrm>
+            <a:off x="838200" y="365125"/>
+            <a:ext cx="10515600" cy="1325563"/>
+          </a:xfrm>
+          <a:prstGeom prst="rect">
+            <a:avLst/>
+          </a:prstGeom>
+        </p:spPr>
+        <p:style>
+          <a:lnRef idx="1">
+            <a:schemeClr val="accent1"/>
+          </a:lnRef>
+          <a:fillRef idx="3">
+            <a:schemeClr val="accent1"/>
+          </a:fillRef>
+          <a:effectRef idx="2">
+            <a:schemeClr val="accent1"/>
+          </a:effectRef>
+          <a:fontRef idx="minor">
+            <a:schemeClr val="lt1"/>
+          </a:fontRef>
+        </p:style>
+        <p:txBody>
+          <a:bodyPr rtlCol="0" anchor="ctr"/>
+          <a:lstStyle/>
+          <a:p>
+            <a:r>
+              <a:t>What Do I Mean by “Orderly”?</a:t>
+            </a:r>
+          </a:p>
+        </p:txBody>
+      </p:sp>
+      <p:sp>
+        <p:nvSpPr>
+          <p:cNvPr id="3" name="Rectangle 2"/>
+          <p:cNvSpPr/>
+          <p:nvPr/>
+        </p:nvSpPr>
+        <p:spPr>
+          <a:xfrm>
+            <a:off x="838200" y="365125"/>
+            <a:ext cx="10515600" cy="1325563"/>
+          </a:xfrm>
+          <a:prstGeom prst="rect">
+            <a:avLst/>
+          </a:prstGeom>
+        </p:spPr>
+        <p:style>
+          <a:lnRef idx="1">
+            <a:schemeClr val="accent1"/>
+          </a:lnRef>
+          <a:fillRef idx="3">
+            <a:schemeClr val="accent1"/>
+          </a:fillRef>
+          <a:effectRef idx="2">
+            <a:schemeClr val="accent1"/>
+          </a:effectRef>
+          <a:fontRef idx="minor">
+            <a:schemeClr val="lt1"/>
+          </a:fontRef>
+        </p:style>
+        <p:txBody>
+          <a:bodyPr rtlCol="0" anchor="ctr"/>
+          <a:lstStyle/>
+          <a:p>
+            <a:r>
+              <a:t>Atoms and Molecules Session 14</a:t>
+            </a:r>
+          </a:p>
+        </p:txBody>
+      </p:sp>
+      <p:sp>
+        <p:nvSpPr>
+          <p:cNvPr id="4" name="Rectangle 3"/>
+          <p:cNvSpPr/>
+          <p:nvPr/>
+        </p:nvSpPr>
+        <p:spPr>
+          <a:xfrm>
+            <a:off x="838200" y="365125"/>
+            <a:ext cx="10515600" cy="1325563"/>
+          </a:xfrm>
+          <a:prstGeom prst="rect">
+            <a:avLst/>
+          </a:prstGeom>
+        </p:spPr>
+        <p:style>
+          <a:lnRef idx="1">
+            <a:schemeClr val="accent1"/>
+          </a:lnRef>
+          <a:fillRef idx="3">
+            <a:schemeClr val="accent1"/>
+          </a:fillRef>
+          <a:effectRef idx="2">
+            <a:schemeClr val="accent1"/>
+          </a:effectRef>
+          <a:fontRef idx="minor">
+            <a:schemeClr val="lt1"/>
+          </a:fontRef>
+        </p:style>
+        <p:txBody>
+          <a:bodyPr rtlCol="0" anchor="ctr"/>
+          <a:lstStyle/>
+          <a:p>
+            <a:r>
+              <a:t>15</a:t>
+            </a:r>
+          </a:p>
+        </p:txBody>
+      </p:sp>
       <p:pic>
         <p:nvPicPr>
-          <p:cNvPr id="2" name="Picture 1" descr="image14.png"/>
+          <p:cNvPr id="5" name="Picture 4" descr="image14.png"/>
           <p:cNvPicPr>
             <a:picLocks noChangeAspect="1"/>
           </p:cNvPicPr>
@@ -4270,7 +5050,673 @@
       </p:pic>
       <p:sp>
         <p:nvSpPr>
-          <p:cNvPr id="3" name="Rectangle 2"/>
+          <p:cNvPr id="6" name="Oval 5"/>
+          <p:cNvSpPr/>
+          <p:nvPr/>
+        </p:nvSpPr>
+        <p:spPr>
+          <a:xfrm>
+            <a:off x="4343400" y="2019300"/>
+            <a:ext cx="152400" cy="152400"/>
+          </a:xfrm>
+          <a:prstGeom prst="ellipse">
+            <a:avLst/>
+          </a:prstGeom>
+        </p:spPr>
+        <p:style>
+          <a:lnRef idx="1">
+            <a:schemeClr val="accent1"/>
+          </a:lnRef>
+          <a:fillRef idx="3">
+            <a:schemeClr val="accent1"/>
+          </a:fillRef>
+          <a:effectRef idx="2">
+            <a:schemeClr val="accent1"/>
+          </a:effectRef>
+          <a:fontRef idx="minor">
+            <a:schemeClr val="lt1"/>
+          </a:fontRef>
+        </p:style>
+        <p:txBody>
+          <a:bodyPr rtlCol="0" anchor="ctr"/>
+          <a:lstStyle/>
+          <a:p>
+            <a:pPr algn="ctr"/>
+          </a:p>
+        </p:txBody>
+      </p:sp>
+      <p:sp>
+        <p:nvSpPr>
+          <p:cNvPr id="7" name="Oval 6"/>
+          <p:cNvSpPr/>
+          <p:nvPr/>
+        </p:nvSpPr>
+        <p:spPr>
+          <a:xfrm>
+            <a:off x="4495800" y="1981200"/>
+            <a:ext cx="228600" cy="228600"/>
+          </a:xfrm>
+          <a:prstGeom prst="ellipse">
+            <a:avLst/>
+          </a:prstGeom>
+        </p:spPr>
+        <p:style>
+          <a:lnRef idx="1">
+            <a:schemeClr val="accent1"/>
+          </a:lnRef>
+          <a:fillRef idx="3">
+            <a:schemeClr val="accent1"/>
+          </a:fillRef>
+          <a:effectRef idx="2">
+            <a:schemeClr val="accent1"/>
+          </a:effectRef>
+          <a:fontRef idx="minor">
+            <a:schemeClr val="lt1"/>
+          </a:fontRef>
+        </p:style>
+        <p:txBody>
+          <a:bodyPr rtlCol="0" anchor="ctr"/>
+          <a:lstStyle/>
+          <a:p>
+            <a:pPr algn="ctr"/>
+          </a:p>
+        </p:txBody>
+      </p:sp>
+      <p:sp>
+        <p:nvSpPr>
+          <p:cNvPr id="8" name="Oval 7"/>
+          <p:cNvSpPr/>
+          <p:nvPr/>
+        </p:nvSpPr>
+        <p:spPr>
+          <a:xfrm>
+            <a:off x="4343400" y="2019300"/>
+            <a:ext cx="152400" cy="152400"/>
+          </a:xfrm>
+          <a:prstGeom prst="ellipse">
+            <a:avLst/>
+          </a:prstGeom>
+        </p:spPr>
+        <p:style>
+          <a:lnRef idx="1">
+            <a:schemeClr val="accent1"/>
+          </a:lnRef>
+          <a:fillRef idx="3">
+            <a:schemeClr val="accent1"/>
+          </a:fillRef>
+          <a:effectRef idx="2">
+            <a:schemeClr val="accent1"/>
+          </a:effectRef>
+          <a:fontRef idx="minor">
+            <a:schemeClr val="lt1"/>
+          </a:fontRef>
+        </p:style>
+        <p:txBody>
+          <a:bodyPr rtlCol="0" anchor="ctr"/>
+          <a:lstStyle/>
+          <a:p>
+            <a:pPr algn="ctr"/>
+          </a:p>
+        </p:txBody>
+      </p:sp>
+      <p:sp>
+        <p:nvSpPr>
+          <p:cNvPr id="9" name="Oval 8"/>
+          <p:cNvSpPr/>
+          <p:nvPr/>
+        </p:nvSpPr>
+        <p:spPr>
+          <a:xfrm>
+            <a:off x="4495800" y="1981200"/>
+            <a:ext cx="228600" cy="228600"/>
+          </a:xfrm>
+          <a:prstGeom prst="ellipse">
+            <a:avLst/>
+          </a:prstGeom>
+        </p:spPr>
+        <p:style>
+          <a:lnRef idx="1">
+            <a:schemeClr val="accent1"/>
+          </a:lnRef>
+          <a:fillRef idx="3">
+            <a:schemeClr val="accent1"/>
+          </a:fillRef>
+          <a:effectRef idx="2">
+            <a:schemeClr val="accent1"/>
+          </a:effectRef>
+          <a:fontRef idx="minor">
+            <a:schemeClr val="lt1"/>
+          </a:fontRef>
+        </p:style>
+        <p:txBody>
+          <a:bodyPr rtlCol="0" anchor="ctr"/>
+          <a:lstStyle/>
+          <a:p>
+            <a:pPr algn="ctr"/>
+          </a:p>
+        </p:txBody>
+      </p:sp>
+      <p:sp>
+        <p:nvSpPr>
+          <p:cNvPr id="10" name="Oval 9"/>
+          <p:cNvSpPr/>
+          <p:nvPr/>
+        </p:nvSpPr>
+        <p:spPr>
+          <a:xfrm>
+            <a:off x="4343400" y="2019300"/>
+            <a:ext cx="152400" cy="152400"/>
+          </a:xfrm>
+          <a:prstGeom prst="ellipse">
+            <a:avLst/>
+          </a:prstGeom>
+        </p:spPr>
+        <p:style>
+          <a:lnRef idx="1">
+            <a:schemeClr val="accent1"/>
+          </a:lnRef>
+          <a:fillRef idx="3">
+            <a:schemeClr val="accent1"/>
+          </a:fillRef>
+          <a:effectRef idx="2">
+            <a:schemeClr val="accent1"/>
+          </a:effectRef>
+          <a:fontRef idx="minor">
+            <a:schemeClr val="lt1"/>
+          </a:fontRef>
+        </p:style>
+        <p:txBody>
+          <a:bodyPr rtlCol="0" anchor="ctr"/>
+          <a:lstStyle/>
+          <a:p>
+            <a:pPr algn="ctr"/>
+          </a:p>
+        </p:txBody>
+      </p:sp>
+      <p:sp>
+        <p:nvSpPr>
+          <p:cNvPr id="11" name="Oval 10"/>
+          <p:cNvSpPr/>
+          <p:nvPr/>
+        </p:nvSpPr>
+        <p:spPr>
+          <a:xfrm>
+            <a:off x="4495800" y="1981200"/>
+            <a:ext cx="228600" cy="228600"/>
+          </a:xfrm>
+          <a:prstGeom prst="ellipse">
+            <a:avLst/>
+          </a:prstGeom>
+        </p:spPr>
+        <p:style>
+          <a:lnRef idx="1">
+            <a:schemeClr val="accent1"/>
+          </a:lnRef>
+          <a:fillRef idx="3">
+            <a:schemeClr val="accent1"/>
+          </a:fillRef>
+          <a:effectRef idx="2">
+            <a:schemeClr val="accent1"/>
+          </a:effectRef>
+          <a:fontRef idx="minor">
+            <a:schemeClr val="lt1"/>
+          </a:fontRef>
+        </p:style>
+        <p:txBody>
+          <a:bodyPr rtlCol="0" anchor="ctr"/>
+          <a:lstStyle/>
+          <a:p>
+            <a:pPr algn="ctr"/>
+          </a:p>
+        </p:txBody>
+      </p:sp>
+      <p:sp>
+        <p:nvSpPr>
+          <p:cNvPr id="12" name="Oval 11"/>
+          <p:cNvSpPr/>
+          <p:nvPr/>
+        </p:nvSpPr>
+        <p:spPr>
+          <a:xfrm>
+            <a:off x="4343400" y="2019300"/>
+            <a:ext cx="152400" cy="152400"/>
+          </a:xfrm>
+          <a:prstGeom prst="ellipse">
+            <a:avLst/>
+          </a:prstGeom>
+        </p:spPr>
+        <p:style>
+          <a:lnRef idx="1">
+            <a:schemeClr val="accent1"/>
+          </a:lnRef>
+          <a:fillRef idx="3">
+            <a:schemeClr val="accent1"/>
+          </a:fillRef>
+          <a:effectRef idx="2">
+            <a:schemeClr val="accent1"/>
+          </a:effectRef>
+          <a:fontRef idx="minor">
+            <a:schemeClr val="lt1"/>
+          </a:fontRef>
+        </p:style>
+        <p:txBody>
+          <a:bodyPr rtlCol="0" anchor="ctr"/>
+          <a:lstStyle/>
+          <a:p>
+            <a:pPr algn="ctr"/>
+          </a:p>
+        </p:txBody>
+      </p:sp>
+      <p:sp>
+        <p:nvSpPr>
+          <p:cNvPr id="13" name="Oval 12"/>
+          <p:cNvSpPr/>
+          <p:nvPr/>
+        </p:nvSpPr>
+        <p:spPr>
+          <a:xfrm>
+            <a:off x="4495800" y="1981200"/>
+            <a:ext cx="228600" cy="228600"/>
+          </a:xfrm>
+          <a:prstGeom prst="ellipse">
+            <a:avLst/>
+          </a:prstGeom>
+        </p:spPr>
+        <p:style>
+          <a:lnRef idx="1">
+            <a:schemeClr val="accent1"/>
+          </a:lnRef>
+          <a:fillRef idx="3">
+            <a:schemeClr val="accent1"/>
+          </a:fillRef>
+          <a:effectRef idx="2">
+            <a:schemeClr val="accent1"/>
+          </a:effectRef>
+          <a:fontRef idx="minor">
+            <a:schemeClr val="lt1"/>
+          </a:fontRef>
+        </p:style>
+        <p:txBody>
+          <a:bodyPr rtlCol="0" anchor="ctr"/>
+          <a:lstStyle/>
+          <a:p>
+            <a:pPr algn="ctr"/>
+          </a:p>
+        </p:txBody>
+      </p:sp>
+      <p:sp>
+        <p:nvSpPr>
+          <p:cNvPr id="14" name="Oval 13"/>
+          <p:cNvSpPr/>
+          <p:nvPr/>
+        </p:nvSpPr>
+        <p:spPr>
+          <a:xfrm>
+            <a:off x="4343400" y="2019300"/>
+            <a:ext cx="152400" cy="152400"/>
+          </a:xfrm>
+          <a:prstGeom prst="ellipse">
+            <a:avLst/>
+          </a:prstGeom>
+        </p:spPr>
+        <p:style>
+          <a:lnRef idx="1">
+            <a:schemeClr val="accent1"/>
+          </a:lnRef>
+          <a:fillRef idx="3">
+            <a:schemeClr val="accent1"/>
+          </a:fillRef>
+          <a:effectRef idx="2">
+            <a:schemeClr val="accent1"/>
+          </a:effectRef>
+          <a:fontRef idx="minor">
+            <a:schemeClr val="lt1"/>
+          </a:fontRef>
+        </p:style>
+        <p:txBody>
+          <a:bodyPr rtlCol="0" anchor="ctr"/>
+          <a:lstStyle/>
+          <a:p>
+            <a:pPr algn="ctr"/>
+          </a:p>
+        </p:txBody>
+      </p:sp>
+      <p:sp>
+        <p:nvSpPr>
+          <p:cNvPr id="15" name="Oval 14"/>
+          <p:cNvSpPr/>
+          <p:nvPr/>
+        </p:nvSpPr>
+        <p:spPr>
+          <a:xfrm>
+            <a:off x="4495800" y="1981200"/>
+            <a:ext cx="228600" cy="228600"/>
+          </a:xfrm>
+          <a:prstGeom prst="ellipse">
+            <a:avLst/>
+          </a:prstGeom>
+        </p:spPr>
+        <p:style>
+          <a:lnRef idx="1">
+            <a:schemeClr val="accent1"/>
+          </a:lnRef>
+          <a:fillRef idx="3">
+            <a:schemeClr val="accent1"/>
+          </a:fillRef>
+          <a:effectRef idx="2">
+            <a:schemeClr val="accent1"/>
+          </a:effectRef>
+          <a:fontRef idx="minor">
+            <a:schemeClr val="lt1"/>
+          </a:fontRef>
+        </p:style>
+        <p:txBody>
+          <a:bodyPr rtlCol="0" anchor="ctr"/>
+          <a:lstStyle/>
+          <a:p>
+            <a:pPr algn="ctr"/>
+          </a:p>
+        </p:txBody>
+      </p:sp>
+      <p:sp>
+        <p:nvSpPr>
+          <p:cNvPr id="16" name="Oval 15"/>
+          <p:cNvSpPr/>
+          <p:nvPr/>
+        </p:nvSpPr>
+        <p:spPr>
+          <a:xfrm>
+            <a:off x="4343400" y="2019300"/>
+            <a:ext cx="152400" cy="152400"/>
+          </a:xfrm>
+          <a:prstGeom prst="ellipse">
+            <a:avLst/>
+          </a:prstGeom>
+        </p:spPr>
+        <p:style>
+          <a:lnRef idx="1">
+            <a:schemeClr val="accent1"/>
+          </a:lnRef>
+          <a:fillRef idx="3">
+            <a:schemeClr val="accent1"/>
+          </a:fillRef>
+          <a:effectRef idx="2">
+            <a:schemeClr val="accent1"/>
+          </a:effectRef>
+          <a:fontRef idx="minor">
+            <a:schemeClr val="lt1"/>
+          </a:fontRef>
+        </p:style>
+        <p:txBody>
+          <a:bodyPr rtlCol="0" anchor="ctr"/>
+          <a:lstStyle/>
+          <a:p>
+            <a:pPr algn="ctr"/>
+          </a:p>
+        </p:txBody>
+      </p:sp>
+      <p:sp>
+        <p:nvSpPr>
+          <p:cNvPr id="17" name="Oval 16"/>
+          <p:cNvSpPr/>
+          <p:nvPr/>
+        </p:nvSpPr>
+        <p:spPr>
+          <a:xfrm>
+            <a:off x="4495800" y="1981200"/>
+            <a:ext cx="228600" cy="228600"/>
+          </a:xfrm>
+          <a:prstGeom prst="ellipse">
+            <a:avLst/>
+          </a:prstGeom>
+        </p:spPr>
+        <p:style>
+          <a:lnRef idx="1">
+            <a:schemeClr val="accent1"/>
+          </a:lnRef>
+          <a:fillRef idx="3">
+            <a:schemeClr val="accent1"/>
+          </a:fillRef>
+          <a:effectRef idx="2">
+            <a:schemeClr val="accent1"/>
+          </a:effectRef>
+          <a:fontRef idx="minor">
+            <a:schemeClr val="lt1"/>
+          </a:fontRef>
+        </p:style>
+        <p:txBody>
+          <a:bodyPr rtlCol="0" anchor="ctr"/>
+          <a:lstStyle/>
+          <a:p>
+            <a:pPr algn="ctr"/>
+          </a:p>
+        </p:txBody>
+      </p:sp>
+      <p:sp>
+        <p:nvSpPr>
+          <p:cNvPr id="18" name="Oval 17"/>
+          <p:cNvSpPr/>
+          <p:nvPr/>
+        </p:nvSpPr>
+        <p:spPr>
+          <a:xfrm>
+            <a:off x="4343400" y="2019300"/>
+            <a:ext cx="152400" cy="152400"/>
+          </a:xfrm>
+          <a:prstGeom prst="ellipse">
+            <a:avLst/>
+          </a:prstGeom>
+        </p:spPr>
+        <p:style>
+          <a:lnRef idx="1">
+            <a:schemeClr val="accent1"/>
+          </a:lnRef>
+          <a:fillRef idx="3">
+            <a:schemeClr val="accent1"/>
+          </a:fillRef>
+          <a:effectRef idx="2">
+            <a:schemeClr val="accent1"/>
+          </a:effectRef>
+          <a:fontRef idx="minor">
+            <a:schemeClr val="lt1"/>
+          </a:fontRef>
+        </p:style>
+        <p:txBody>
+          <a:bodyPr rtlCol="0" anchor="ctr"/>
+          <a:lstStyle/>
+          <a:p>
+            <a:pPr algn="ctr"/>
+          </a:p>
+        </p:txBody>
+      </p:sp>
+      <p:sp>
+        <p:nvSpPr>
+          <p:cNvPr id="19" name="Oval 18"/>
+          <p:cNvSpPr/>
+          <p:nvPr/>
+        </p:nvSpPr>
+        <p:spPr>
+          <a:xfrm>
+            <a:off x="4495800" y="1981200"/>
+            <a:ext cx="228600" cy="228600"/>
+          </a:xfrm>
+          <a:prstGeom prst="ellipse">
+            <a:avLst/>
+          </a:prstGeom>
+        </p:spPr>
+        <p:style>
+          <a:lnRef idx="1">
+            <a:schemeClr val="accent1"/>
+          </a:lnRef>
+          <a:fillRef idx="3">
+            <a:schemeClr val="accent1"/>
+          </a:fillRef>
+          <a:effectRef idx="2">
+            <a:schemeClr val="accent1"/>
+          </a:effectRef>
+          <a:fontRef idx="minor">
+            <a:schemeClr val="lt1"/>
+          </a:fontRef>
+        </p:style>
+        <p:txBody>
+          <a:bodyPr rtlCol="0" anchor="ctr"/>
+          <a:lstStyle/>
+          <a:p>
+            <a:pPr algn="ctr"/>
+          </a:p>
+        </p:txBody>
+      </p:sp>
+      <p:sp>
+        <p:nvSpPr>
+          <p:cNvPr id="20" name="Oval 19"/>
+          <p:cNvSpPr/>
+          <p:nvPr/>
+        </p:nvSpPr>
+        <p:spPr>
+          <a:xfrm>
+            <a:off x="4343400" y="2019300"/>
+            <a:ext cx="152400" cy="152400"/>
+          </a:xfrm>
+          <a:prstGeom prst="ellipse">
+            <a:avLst/>
+          </a:prstGeom>
+        </p:spPr>
+        <p:style>
+          <a:lnRef idx="1">
+            <a:schemeClr val="accent1"/>
+          </a:lnRef>
+          <a:fillRef idx="3">
+            <a:schemeClr val="accent1"/>
+          </a:fillRef>
+          <a:effectRef idx="2">
+            <a:schemeClr val="accent1"/>
+          </a:effectRef>
+          <a:fontRef idx="minor">
+            <a:schemeClr val="lt1"/>
+          </a:fontRef>
+        </p:style>
+        <p:txBody>
+          <a:bodyPr rtlCol="0" anchor="ctr"/>
+          <a:lstStyle/>
+          <a:p>
+            <a:pPr algn="ctr"/>
+          </a:p>
+        </p:txBody>
+      </p:sp>
+      <p:sp>
+        <p:nvSpPr>
+          <p:cNvPr id="21" name="Oval 20"/>
+          <p:cNvSpPr/>
+          <p:nvPr/>
+        </p:nvSpPr>
+        <p:spPr>
+          <a:xfrm>
+            <a:off x="4495800" y="1981200"/>
+            <a:ext cx="228600" cy="228600"/>
+          </a:xfrm>
+          <a:prstGeom prst="ellipse">
+            <a:avLst/>
+          </a:prstGeom>
+        </p:spPr>
+        <p:style>
+          <a:lnRef idx="1">
+            <a:schemeClr val="accent1"/>
+          </a:lnRef>
+          <a:fillRef idx="3">
+            <a:schemeClr val="accent1"/>
+          </a:fillRef>
+          <a:effectRef idx="2">
+            <a:schemeClr val="accent1"/>
+          </a:effectRef>
+          <a:fontRef idx="minor">
+            <a:schemeClr val="lt1"/>
+          </a:fontRef>
+        </p:style>
+        <p:txBody>
+          <a:bodyPr rtlCol="0" anchor="ctr"/>
+          <a:lstStyle/>
+          <a:p>
+            <a:pPr algn="ctr"/>
+          </a:p>
+        </p:txBody>
+      </p:sp>
+      <p:sp>
+        <p:nvSpPr>
+          <p:cNvPr id="22" name="Oval 21"/>
+          <p:cNvSpPr/>
+          <p:nvPr/>
+        </p:nvSpPr>
+        <p:spPr>
+          <a:xfrm>
+            <a:off x="4343400" y="2019300"/>
+            <a:ext cx="152400" cy="152400"/>
+          </a:xfrm>
+          <a:prstGeom prst="ellipse">
+            <a:avLst/>
+          </a:prstGeom>
+        </p:spPr>
+        <p:style>
+          <a:lnRef idx="1">
+            <a:schemeClr val="accent1"/>
+          </a:lnRef>
+          <a:fillRef idx="3">
+            <a:schemeClr val="accent1"/>
+          </a:fillRef>
+          <a:effectRef idx="2">
+            <a:schemeClr val="accent1"/>
+          </a:effectRef>
+          <a:fontRef idx="minor">
+            <a:schemeClr val="lt1"/>
+          </a:fontRef>
+        </p:style>
+        <p:txBody>
+          <a:bodyPr rtlCol="0" anchor="ctr"/>
+          <a:lstStyle/>
+          <a:p>
+            <a:pPr algn="ctr"/>
+          </a:p>
+        </p:txBody>
+      </p:sp>
+      <p:sp>
+        <p:nvSpPr>
+          <p:cNvPr id="23" name="Oval 22"/>
+          <p:cNvSpPr/>
+          <p:nvPr/>
+        </p:nvSpPr>
+        <p:spPr>
+          <a:xfrm>
+            <a:off x="4495800" y="1981200"/>
+            <a:ext cx="228600" cy="228600"/>
+          </a:xfrm>
+          <a:prstGeom prst="ellipse">
+            <a:avLst/>
+          </a:prstGeom>
+        </p:spPr>
+        <p:style>
+          <a:lnRef idx="1">
+            <a:schemeClr val="accent1"/>
+          </a:lnRef>
+          <a:fillRef idx="3">
+            <a:schemeClr val="accent1"/>
+          </a:fillRef>
+          <a:effectRef idx="2">
+            <a:schemeClr val="accent1"/>
+          </a:effectRef>
+          <a:fontRef idx="minor">
+            <a:schemeClr val="lt1"/>
+          </a:fontRef>
+        </p:style>
+        <p:txBody>
+          <a:bodyPr rtlCol="0" anchor="ctr"/>
+          <a:lstStyle/>
+          <a:p>
+            <a:pPr algn="ctr"/>
+          </a:p>
+        </p:txBody>
+      </p:sp>
+      <p:sp>
+        <p:nvSpPr>
+          <p:cNvPr id="24" name="Rectangle 23"/>
           <p:cNvSpPr/>
           <p:nvPr/>
         </p:nvSpPr>
@@ -4309,7 +5755,7 @@
       </p:sp>
       <p:sp>
         <p:nvSpPr>
-          <p:cNvPr id="4" name="Rectangle 3"/>
+          <p:cNvPr id="25" name="Rectangle 24"/>
           <p:cNvSpPr/>
           <p:nvPr/>
         </p:nvSpPr>
@@ -4348,7 +5794,7 @@
       </p:sp>
       <p:pic>
         <p:nvPicPr>
-          <p:cNvPr id="5" name="Picture 4" descr="image15.jpeg"/>
+          <p:cNvPr id="26" name="Picture 25" descr="image15.jpeg"/>
           <p:cNvPicPr>
             <a:picLocks noChangeAspect="1"/>
           </p:cNvPicPr>
@@ -4372,7 +5818,7 @@
       </p:pic>
       <p:sp>
         <p:nvSpPr>
-          <p:cNvPr id="6" name="Rectangle 5"/>
+          <p:cNvPr id="27" name="Rectangle 26"/>
           <p:cNvSpPr/>
           <p:nvPr/>
         </p:nvSpPr>
@@ -4409,7 +5855,7 @@
       </p:sp>
       <p:sp>
         <p:nvSpPr>
-          <p:cNvPr id="7" name="Rectangle 6"/>
+          <p:cNvPr id="28" name="Rectangle 27"/>
           <p:cNvSpPr/>
           <p:nvPr/>
         </p:nvSpPr>
@@ -4472,6 +5918,123 @@
         </p:nvSpPr>
         <p:spPr>
           <a:xfrm>
+            <a:off x="838200" y="365125"/>
+            <a:ext cx="10515600" cy="1325563"/>
+          </a:xfrm>
+          <a:prstGeom prst="rect">
+            <a:avLst/>
+          </a:prstGeom>
+        </p:spPr>
+        <p:style>
+          <a:lnRef idx="1">
+            <a:schemeClr val="accent1"/>
+          </a:lnRef>
+          <a:fillRef idx="3">
+            <a:schemeClr val="accent1"/>
+          </a:fillRef>
+          <a:effectRef idx="2">
+            <a:schemeClr val="accent1"/>
+          </a:effectRef>
+          <a:fontRef idx="minor">
+            <a:schemeClr val="lt1"/>
+          </a:fontRef>
+        </p:style>
+        <p:txBody>
+          <a:bodyPr rtlCol="0" anchor="ctr"/>
+          <a:lstStyle/>
+          <a:p>
+            <a:r>
+              <a:t>Experiment 2: Growing Needle-Shaped Crystals</a:t>
+            </a:r>
+          </a:p>
+        </p:txBody>
+      </p:sp>
+      <p:sp>
+        <p:nvSpPr>
+          <p:cNvPr id="3" name="Rectangle 2"/>
+          <p:cNvSpPr/>
+          <p:nvPr/>
+        </p:nvSpPr>
+        <p:spPr>
+          <a:xfrm>
+            <a:off x="838200" y="365125"/>
+            <a:ext cx="10515600" cy="1325563"/>
+          </a:xfrm>
+          <a:prstGeom prst="rect">
+            <a:avLst/>
+          </a:prstGeom>
+        </p:spPr>
+        <p:style>
+          <a:lnRef idx="1">
+            <a:schemeClr val="accent1"/>
+          </a:lnRef>
+          <a:fillRef idx="3">
+            <a:schemeClr val="accent1"/>
+          </a:fillRef>
+          <a:effectRef idx="2">
+            <a:schemeClr val="accent1"/>
+          </a:effectRef>
+          <a:fontRef idx="minor">
+            <a:schemeClr val="lt1"/>
+          </a:fontRef>
+        </p:style>
+        <p:txBody>
+          <a:bodyPr rtlCol="0" anchor="ctr"/>
+          <a:lstStyle/>
+          <a:p>
+            <a:r>
+              <a:t>16</a:t>
+            </a:r>
+          </a:p>
+        </p:txBody>
+      </p:sp>
+      <p:sp>
+        <p:nvSpPr>
+          <p:cNvPr id="4" name="Rectangle 3"/>
+          <p:cNvSpPr/>
+          <p:nvPr/>
+        </p:nvSpPr>
+        <p:spPr>
+          <a:xfrm>
+            <a:off x="838200" y="365125"/>
+            <a:ext cx="10515600" cy="1325563"/>
+          </a:xfrm>
+          <a:prstGeom prst="rect">
+            <a:avLst/>
+          </a:prstGeom>
+        </p:spPr>
+        <p:style>
+          <a:lnRef idx="1">
+            <a:schemeClr val="accent1"/>
+          </a:lnRef>
+          <a:fillRef idx="3">
+            <a:schemeClr val="accent1"/>
+          </a:fillRef>
+          <a:effectRef idx="2">
+            <a:schemeClr val="accent1"/>
+          </a:effectRef>
+          <a:fontRef idx="minor">
+            <a:schemeClr val="lt1"/>
+          </a:fontRef>
+        </p:style>
+        <p:txBody>
+          <a:bodyPr rtlCol="0" anchor="ctr"/>
+          <a:lstStyle/>
+          <a:p>
+            <a:r>
+              <a:t>Atoms and Molecules Session 14</a:t>
+            </a:r>
+          </a:p>
+        </p:txBody>
+      </p:sp>
+      <p:sp>
+        <p:nvSpPr>
+          <p:cNvPr id="5" name="Rectangle 4"/>
+          <p:cNvSpPr/>
+          <p:nvPr/>
+        </p:nvSpPr>
+        <p:spPr>
+          <a:xfrm>
             <a:off x="457200" y="1905000"/>
             <a:ext cx="2779059" cy="4525963"/>
           </a:xfrm>
@@ -4505,7 +6068,7 @@
       </p:sp>
       <p:sp>
         <p:nvSpPr>
-          <p:cNvPr id="3" name="Rectangle 2"/>
+          <p:cNvPr id="6" name="Rectangle 5"/>
           <p:cNvSpPr/>
           <p:nvPr/>
         </p:nvSpPr>
@@ -4542,7 +6105,7 @@
       </p:sp>
       <p:pic>
         <p:nvPicPr>
-          <p:cNvPr id="4" name="Picture 3" descr="image16.jpeg"/>
+          <p:cNvPr id="7" name="Picture 6" descr="image16.jpeg"/>
           <p:cNvPicPr>
             <a:picLocks noChangeAspect="1"/>
           </p:cNvPicPr>
@@ -4566,7 +6129,7 @@
       </p:pic>
       <p:pic>
         <p:nvPicPr>
-          <p:cNvPr id="5" name="Picture 4" descr="image17.jpeg"/>
+          <p:cNvPr id="8" name="Picture 7" descr="image17.jpeg"/>
           <p:cNvPicPr>
             <a:picLocks noChangeAspect="1"/>
           </p:cNvPicPr>
@@ -4590,7 +6153,7 @@
       </p:pic>
       <p:pic>
         <p:nvPicPr>
-          <p:cNvPr id="6" name="Picture 5" descr="image18.jpeg"/>
+          <p:cNvPr id="9" name="Picture 8" descr="image18.jpeg"/>
           <p:cNvPicPr>
             <a:picLocks noChangeAspect="1"/>
           </p:cNvPicPr>
@@ -4614,7 +6177,7 @@
       </p:pic>
       <p:pic>
         <p:nvPicPr>
-          <p:cNvPr id="7" name="Picture 6" descr="image19.jpeg"/>
+          <p:cNvPr id="10" name="Picture 9" descr="image19.jpeg"/>
           <p:cNvPicPr>
             <a:picLocks noChangeAspect="1"/>
           </p:cNvPicPr>
@@ -4638,7 +6201,7 @@
       </p:pic>
       <p:pic>
         <p:nvPicPr>
-          <p:cNvPr id="8" name="Picture 7" descr="image20.gif"/>
+          <p:cNvPr id="11" name="Picture 10" descr="image20.gif"/>
           <p:cNvPicPr>
             <a:picLocks noChangeAspect="1"/>
           </p:cNvPicPr>
@@ -4826,6 +6389,84 @@
           <a:p>
             <a:r>
               <a:t>Turn your bowl upside down on the construction paper and trace it.Cut the circle out and fit it inside the plastic plate.Fill the baby food jar half full of warm water, then add 2 Tablespoons of epsom salt.Put the lid on and shake 60 times.Let the contents of the jar settle for a couple of minutes.Pour the liquid onto the black paper. Don’t pour any undissolved epsom salt onto the paper.Wait a few days, then look at the crystals. What do they look like?</a:t>
+            </a:r>
+          </a:p>
+        </p:txBody>
+      </p:sp>
+      <p:sp>
+        <p:nvSpPr>
+          <p:cNvPr id="6" name="Rectangle 5"/>
+          <p:cNvSpPr/>
+          <p:nvPr/>
+        </p:nvSpPr>
+        <p:spPr>
+          <a:xfrm>
+            <a:off x="838200" y="365125"/>
+            <a:ext cx="10515600" cy="1325563"/>
+          </a:xfrm>
+          <a:prstGeom prst="rect">
+            <a:avLst/>
+          </a:prstGeom>
+        </p:spPr>
+        <p:style>
+          <a:lnRef idx="1">
+            <a:schemeClr val="accent1"/>
+          </a:lnRef>
+          <a:fillRef idx="3">
+            <a:schemeClr val="accent1"/>
+          </a:fillRef>
+          <a:effectRef idx="2">
+            <a:schemeClr val="accent1"/>
+          </a:effectRef>
+          <a:fontRef idx="minor">
+            <a:schemeClr val="lt1"/>
+          </a:fontRef>
+        </p:style>
+        <p:txBody>
+          <a:bodyPr rtlCol="0" anchor="ctr"/>
+          <a:lstStyle/>
+          <a:p>
+            <a:r>
+              <a:t>17</a:t>
+            </a:r>
+          </a:p>
+        </p:txBody>
+      </p:sp>
+      <p:sp>
+        <p:nvSpPr>
+          <p:cNvPr id="7" name="Rectangle 6"/>
+          <p:cNvSpPr/>
+          <p:nvPr/>
+        </p:nvSpPr>
+        <p:spPr>
+          <a:xfrm>
+            <a:off x="838200" y="365125"/>
+            <a:ext cx="10515600" cy="1325563"/>
+          </a:xfrm>
+          <a:prstGeom prst="rect">
+            <a:avLst/>
+          </a:prstGeom>
+        </p:spPr>
+        <p:style>
+          <a:lnRef idx="1">
+            <a:schemeClr val="accent1"/>
+          </a:lnRef>
+          <a:fillRef idx="3">
+            <a:schemeClr val="accent1"/>
+          </a:fillRef>
+          <a:effectRef idx="2">
+            <a:schemeClr val="accent1"/>
+          </a:effectRef>
+          <a:fontRef idx="minor">
+            <a:schemeClr val="lt1"/>
+          </a:fontRef>
+        </p:style>
+        <p:txBody>
+          <a:bodyPr rtlCol="0" anchor="ctr"/>
+          <a:lstStyle/>
+          <a:p>
+            <a:r>
+              <a:t>Atoms and Molecules Session 14</a:t>
             </a:r>
           </a:p>
         </p:txBody>
@@ -4880,6 +6521,45 @@
         </p:nvSpPr>
         <p:spPr>
           <a:xfrm>
+            <a:off x="838200" y="365125"/>
+            <a:ext cx="10515600" cy="1325563"/>
+          </a:xfrm>
+          <a:prstGeom prst="rect">
+            <a:avLst/>
+          </a:prstGeom>
+        </p:spPr>
+        <p:style>
+          <a:lnRef idx="1">
+            <a:schemeClr val="accent1"/>
+          </a:lnRef>
+          <a:fillRef idx="3">
+            <a:schemeClr val="accent1"/>
+          </a:fillRef>
+          <a:effectRef idx="2">
+            <a:schemeClr val="accent1"/>
+          </a:effectRef>
+          <a:fontRef idx="minor">
+            <a:schemeClr val="lt1"/>
+          </a:fontRef>
+        </p:style>
+        <p:txBody>
+          <a:bodyPr rtlCol="0" anchor="ctr"/>
+          <a:lstStyle/>
+          <a:p>
+            <a:r>
+              <a:t>Science Vocabulary for This Week</a:t>
+            </a:r>
+          </a:p>
+        </p:txBody>
+      </p:sp>
+      <p:sp>
+        <p:nvSpPr>
+          <p:cNvPr id="4" name="Rectangle 3"/>
+          <p:cNvSpPr/>
+          <p:nvPr/>
+        </p:nvSpPr>
+        <p:spPr>
+          <a:xfrm>
             <a:off x="457201" y="1247775"/>
             <a:ext cx="3714750" cy="5276850"/>
           </a:xfrm>
@@ -4913,7 +6593,7 @@
       </p:sp>
       <p:sp>
         <p:nvSpPr>
-          <p:cNvPr id="4" name="Rectangle 3"/>
+          <p:cNvPr id="5" name="Rectangle 4"/>
           <p:cNvSpPr/>
           <p:nvPr/>
         </p:nvSpPr>
@@ -4950,7 +6630,7 @@
       </p:sp>
       <p:sp>
         <p:nvSpPr>
-          <p:cNvPr id="5" name="Rectangle 4"/>
+          <p:cNvPr id="6" name="Rectangle 5"/>
           <p:cNvSpPr/>
           <p:nvPr/>
         </p:nvSpPr>
@@ -4987,7 +6667,7 @@
       </p:sp>
       <p:sp>
         <p:nvSpPr>
-          <p:cNvPr id="6" name="Rectangle 5"/>
+          <p:cNvPr id="7" name="Rectangle 6"/>
           <p:cNvSpPr/>
           <p:nvPr/>
         </p:nvSpPr>
@@ -5024,7 +6704,7 @@
       </p:sp>
       <p:sp>
         <p:nvSpPr>
-          <p:cNvPr id="7" name="Rectangle 6"/>
+          <p:cNvPr id="8" name="Rectangle 7"/>
           <p:cNvSpPr/>
           <p:nvPr/>
         </p:nvSpPr>
@@ -5061,7 +6741,7 @@
       </p:sp>
       <p:sp>
         <p:nvSpPr>
-          <p:cNvPr id="8" name="Rectangle 7"/>
+          <p:cNvPr id="9" name="Rectangle 8"/>
           <p:cNvSpPr/>
           <p:nvPr/>
         </p:nvSpPr>
@@ -5098,7 +6778,7 @@
       </p:sp>
       <p:sp>
         <p:nvSpPr>
-          <p:cNvPr id="9" name="Rectangle 8"/>
+          <p:cNvPr id="10" name="Rectangle 9"/>
           <p:cNvSpPr/>
           <p:nvPr/>
         </p:nvSpPr>
@@ -5135,7 +6815,7 @@
       </p:sp>
       <p:sp>
         <p:nvSpPr>
-          <p:cNvPr id="10" name="Rectangle 9"/>
+          <p:cNvPr id="11" name="Rectangle 10"/>
           <p:cNvSpPr/>
           <p:nvPr/>
         </p:nvSpPr>
@@ -5172,7 +6852,7 @@
       </p:sp>
       <p:sp>
         <p:nvSpPr>
-          <p:cNvPr id="11" name="Rectangle 10"/>
+          <p:cNvPr id="12" name="Rectangle 11"/>
           <p:cNvSpPr/>
           <p:nvPr/>
         </p:nvSpPr>
@@ -5209,7 +6889,7 @@
       </p:sp>
       <p:sp>
         <p:nvSpPr>
-          <p:cNvPr id="12" name="Rectangle 11"/>
+          <p:cNvPr id="13" name="Rectangle 12"/>
           <p:cNvSpPr/>
           <p:nvPr/>
         </p:nvSpPr>
@@ -5244,9 +6924,87 @@
           </a:p>
         </p:txBody>
       </p:sp>
+      <p:sp>
+        <p:nvSpPr>
+          <p:cNvPr id="14" name="Rectangle 13"/>
+          <p:cNvSpPr/>
+          <p:nvPr/>
+        </p:nvSpPr>
+        <p:spPr>
+          <a:xfrm>
+            <a:off x="838200" y="365125"/>
+            <a:ext cx="10515600" cy="1325563"/>
+          </a:xfrm>
+          <a:prstGeom prst="rect">
+            <a:avLst/>
+          </a:prstGeom>
+        </p:spPr>
+        <p:style>
+          <a:lnRef idx="1">
+            <a:schemeClr val="accent1"/>
+          </a:lnRef>
+          <a:fillRef idx="3">
+            <a:schemeClr val="accent1"/>
+          </a:fillRef>
+          <a:effectRef idx="2">
+            <a:schemeClr val="accent1"/>
+          </a:effectRef>
+          <a:fontRef idx="minor">
+            <a:schemeClr val="lt1"/>
+          </a:fontRef>
+        </p:style>
+        <p:txBody>
+          <a:bodyPr rtlCol="0" anchor="ctr"/>
+          <a:lstStyle/>
+          <a:p>
+            <a:r>
+              <a:t>18</a:t>
+            </a:r>
+          </a:p>
+        </p:txBody>
+      </p:sp>
+      <p:sp>
+        <p:nvSpPr>
+          <p:cNvPr id="15" name="Rectangle 14"/>
+          <p:cNvSpPr/>
+          <p:nvPr/>
+        </p:nvSpPr>
+        <p:spPr>
+          <a:xfrm>
+            <a:off x="838200" y="365125"/>
+            <a:ext cx="10515600" cy="1325563"/>
+          </a:xfrm>
+          <a:prstGeom prst="rect">
+            <a:avLst/>
+          </a:prstGeom>
+        </p:spPr>
+        <p:style>
+          <a:lnRef idx="1">
+            <a:schemeClr val="accent1"/>
+          </a:lnRef>
+          <a:fillRef idx="3">
+            <a:schemeClr val="accent1"/>
+          </a:fillRef>
+          <a:effectRef idx="2">
+            <a:schemeClr val="accent1"/>
+          </a:effectRef>
+          <a:fontRef idx="minor">
+            <a:schemeClr val="lt1"/>
+          </a:fontRef>
+        </p:style>
+        <p:txBody>
+          <a:bodyPr rtlCol="0" anchor="ctr"/>
+          <a:lstStyle/>
+          <a:p>
+            <a:r>
+              <a:t>Atoms and Molecules Session 14</a:t>
+            </a:r>
+          </a:p>
+        </p:txBody>
+      </p:sp>
       <p:pic>
         <p:nvPicPr>
-          <p:cNvPr id="13" name="Picture 12" descr="image7.jpeg"/>
+          <p:cNvPr id="16" name="Picture 15" descr="image7.jpeg"/>
           <p:cNvPicPr>
             <a:picLocks noChangeAspect="1"/>
           </p:cNvPicPr>
@@ -5917,7 +7675,118 @@
       </p:sp>
       <p:sp>
         <p:nvSpPr>
-          <p:cNvPr id="19" name="Rectangle 18"/>
+          <p:cNvPr id="19" name="Oval 18"/>
+          <p:cNvSpPr/>
+          <p:nvPr/>
+        </p:nvSpPr>
+        <p:spPr>
+          <a:xfrm>
+            <a:off x="1285875" y="676275"/>
+            <a:ext cx="5610225" cy="5610225"/>
+          </a:xfrm>
+          <a:prstGeom prst="ellipse">
+            <a:avLst/>
+          </a:prstGeom>
+        </p:spPr>
+        <p:style>
+          <a:lnRef idx="1">
+            <a:schemeClr val="accent1"/>
+          </a:lnRef>
+          <a:fillRef idx="3">
+            <a:schemeClr val="accent1"/>
+          </a:fillRef>
+          <a:effectRef idx="2">
+            <a:schemeClr val="accent1"/>
+          </a:effectRef>
+          <a:fontRef idx="minor">
+            <a:schemeClr val="lt1"/>
+          </a:fontRef>
+        </p:style>
+        <p:txBody>
+          <a:bodyPr rtlCol="0" anchor="ctr"/>
+          <a:lstStyle/>
+          <a:p>
+            <a:pPr algn="ctr"/>
+          </a:p>
+        </p:txBody>
+      </p:sp>
+      <p:sp>
+        <p:nvSpPr>
+          <p:cNvPr id="20" name="Oval 19"/>
+          <p:cNvSpPr/>
+          <p:nvPr/>
+        </p:nvSpPr>
+        <p:spPr>
+          <a:xfrm>
+            <a:off x="1676400" y="1047750"/>
+            <a:ext cx="4895850" cy="4895850"/>
+          </a:xfrm>
+          <a:prstGeom prst="ellipse">
+            <a:avLst/>
+          </a:prstGeom>
+        </p:spPr>
+        <p:style>
+          <a:lnRef idx="1">
+            <a:schemeClr val="accent1"/>
+          </a:lnRef>
+          <a:fillRef idx="3">
+            <a:schemeClr val="accent1"/>
+          </a:fillRef>
+          <a:effectRef idx="2">
+            <a:schemeClr val="accent1"/>
+          </a:effectRef>
+          <a:fontRef idx="minor">
+            <a:schemeClr val="lt1"/>
+          </a:fontRef>
+        </p:style>
+        <p:txBody>
+          <a:bodyPr rtlCol="0" anchor="ctr"/>
+          <a:lstStyle/>
+          <a:p>
+            <a:pPr algn="ctr"/>
+          </a:p>
+        </p:txBody>
+      </p:sp>
+      <p:sp>
+        <p:nvSpPr>
+          <p:cNvPr id="21" name="Rectangle 20"/>
+          <p:cNvSpPr/>
+          <p:nvPr/>
+        </p:nvSpPr>
+        <p:spPr>
+          <a:xfrm>
+            <a:off x="1562100" y="3200400"/>
+            <a:ext cx="5114925" cy="361950"/>
+          </a:xfrm>
+          <a:prstGeom prst="rect">
+            <a:avLst/>
+          </a:prstGeom>
+        </p:spPr>
+        <p:style>
+          <a:lnRef idx="1">
+            <a:schemeClr val="accent1"/>
+          </a:lnRef>
+          <a:fillRef idx="3">
+            <a:schemeClr val="accent1"/>
+          </a:fillRef>
+          <a:effectRef idx="2">
+            <a:schemeClr val="accent1"/>
+          </a:effectRef>
+          <a:fontRef idx="minor">
+            <a:schemeClr val="lt1"/>
+          </a:fontRef>
+        </p:style>
+        <p:txBody>
+          <a:bodyPr rtlCol="0" anchor="ctr"/>
+          <a:lstStyle/>
+          <a:p>
+            <a:pPr algn="ctr"/>
+          </a:p>
+        </p:txBody>
+      </p:sp>
+      <p:sp>
+        <p:nvSpPr>
+          <p:cNvPr id="22" name="Rectangle 21"/>
           <p:cNvSpPr/>
           <p:nvPr/>
         </p:nvSpPr>
@@ -5956,7 +7825,7 @@
       </p:sp>
       <p:sp>
         <p:nvSpPr>
-          <p:cNvPr id="20" name="Rectangle 19"/>
+          <p:cNvPr id="23" name="Rectangle 22"/>
           <p:cNvSpPr/>
           <p:nvPr/>
         </p:nvSpPr>
@@ -5989,6 +7858,84 @@
           <a:p>
             <a:r>
               <a:t>No!!!  Too Complicated!</a:t>
+            </a:r>
+          </a:p>
+        </p:txBody>
+      </p:sp>
+      <p:sp>
+        <p:nvSpPr>
+          <p:cNvPr id="24" name="Rectangle 23"/>
+          <p:cNvSpPr/>
+          <p:nvPr/>
+        </p:nvSpPr>
+        <p:spPr>
+          <a:xfrm>
+            <a:off x="838200" y="365125"/>
+            <a:ext cx="10515600" cy="1325563"/>
+          </a:xfrm>
+          <a:prstGeom prst="rect">
+            <a:avLst/>
+          </a:prstGeom>
+        </p:spPr>
+        <p:style>
+          <a:lnRef idx="1">
+            <a:schemeClr val="accent1"/>
+          </a:lnRef>
+          <a:fillRef idx="3">
+            <a:schemeClr val="accent1"/>
+          </a:fillRef>
+          <a:effectRef idx="2">
+            <a:schemeClr val="accent1"/>
+          </a:effectRef>
+          <a:fontRef idx="minor">
+            <a:schemeClr val="lt1"/>
+          </a:fontRef>
+        </p:style>
+        <p:txBody>
+          <a:bodyPr rtlCol="0" anchor="ctr"/>
+          <a:lstStyle/>
+          <a:p>
+            <a:r>
+              <a:t>2</a:t>
+            </a:r>
+          </a:p>
+        </p:txBody>
+      </p:sp>
+      <p:sp>
+        <p:nvSpPr>
+          <p:cNvPr id="25" name="Rectangle 24"/>
+          <p:cNvSpPr/>
+          <p:nvPr/>
+        </p:nvSpPr>
+        <p:spPr>
+          <a:xfrm>
+            <a:off x="838200" y="365125"/>
+            <a:ext cx="10515600" cy="1325563"/>
+          </a:xfrm>
+          <a:prstGeom prst="rect">
+            <a:avLst/>
+          </a:prstGeom>
+        </p:spPr>
+        <p:style>
+          <a:lnRef idx="1">
+            <a:schemeClr val="accent1"/>
+          </a:lnRef>
+          <a:fillRef idx="3">
+            <a:schemeClr val="accent1"/>
+          </a:fillRef>
+          <a:effectRef idx="2">
+            <a:schemeClr val="accent1"/>
+          </a:effectRef>
+          <a:fontRef idx="minor">
+            <a:schemeClr val="lt1"/>
+          </a:fontRef>
+        </p:style>
+        <p:txBody>
+          <a:bodyPr rtlCol="0" anchor="ctr"/>
+          <a:lstStyle/>
+          <a:p>
+            <a:r>
+              <a:t>Atoms and Molecules Session 14</a:t>
             </a:r>
           </a:p>
         </p:txBody>
@@ -6082,6 +8029,84 @@
         </p:nvSpPr>
         <p:spPr>
           <a:xfrm>
+            <a:off x="838200" y="365125"/>
+            <a:ext cx="10515600" cy="1325563"/>
+          </a:xfrm>
+          <a:prstGeom prst="rect">
+            <a:avLst/>
+          </a:prstGeom>
+        </p:spPr>
+        <p:style>
+          <a:lnRef idx="1">
+            <a:schemeClr val="accent1"/>
+          </a:lnRef>
+          <a:fillRef idx="3">
+            <a:schemeClr val="accent1"/>
+          </a:fillRef>
+          <a:effectRef idx="2">
+            <a:schemeClr val="accent1"/>
+          </a:effectRef>
+          <a:fontRef idx="minor">
+            <a:schemeClr val="lt1"/>
+          </a:fontRef>
+        </p:style>
+        <p:txBody>
+          <a:bodyPr rtlCol="0" anchor="ctr"/>
+          <a:lstStyle/>
+          <a:p>
+            <a:r>
+              <a:t>3</a:t>
+            </a:r>
+          </a:p>
+        </p:txBody>
+      </p:sp>
+      <p:sp>
+        <p:nvSpPr>
+          <p:cNvPr id="5" name="Rectangle 4"/>
+          <p:cNvSpPr/>
+          <p:nvPr/>
+        </p:nvSpPr>
+        <p:spPr>
+          <a:xfrm>
+            <a:off x="838200" y="365125"/>
+            <a:ext cx="10515600" cy="1325563"/>
+          </a:xfrm>
+          <a:prstGeom prst="rect">
+            <a:avLst/>
+          </a:prstGeom>
+        </p:spPr>
+        <p:style>
+          <a:lnRef idx="1">
+            <a:schemeClr val="accent1"/>
+          </a:lnRef>
+          <a:fillRef idx="3">
+            <a:schemeClr val="accent1"/>
+          </a:fillRef>
+          <a:effectRef idx="2">
+            <a:schemeClr val="accent1"/>
+          </a:effectRef>
+          <a:fontRef idx="minor">
+            <a:schemeClr val="lt1"/>
+          </a:fontRef>
+        </p:style>
+        <p:txBody>
+          <a:bodyPr rtlCol="0" anchor="ctr"/>
+          <a:lstStyle/>
+          <a:p>
+            <a:r>
+              <a:t>Atoms and Molecules Session 14</a:t>
+            </a:r>
+          </a:p>
+        </p:txBody>
+      </p:sp>
+      <p:sp>
+        <p:nvSpPr>
+          <p:cNvPr id="6" name="Rectangle 5"/>
+          <p:cNvSpPr/>
+          <p:nvPr/>
+        </p:nvSpPr>
+        <p:spPr>
+          <a:xfrm>
             <a:off x="2133600" y="5650468"/>
             <a:ext cx="4876800" cy="646331"/>
           </a:xfrm>
@@ -6170,6 +8195,145 @@
           </a:p>
         </p:txBody>
       </p:sp>
+      <p:sp>
+        <p:nvSpPr>
+          <p:cNvPr id="3" name="Rectangle 2"/>
+          <p:cNvSpPr/>
+          <p:nvPr/>
+        </p:nvSpPr>
+        <p:spPr>
+          <a:xfrm>
+            <a:off x="838200" y="365125"/>
+            <a:ext cx="10515600" cy="1325563"/>
+          </a:xfrm>
+          <a:prstGeom prst="rect">
+            <a:avLst/>
+          </a:prstGeom>
+        </p:spPr>
+        <p:style>
+          <a:lnRef idx="1">
+            <a:schemeClr val="accent1"/>
+          </a:lnRef>
+          <a:fillRef idx="3">
+            <a:schemeClr val="accent1"/>
+          </a:fillRef>
+          <a:effectRef idx="2">
+            <a:schemeClr val="accent1"/>
+          </a:effectRef>
+          <a:fontRef idx="minor">
+            <a:schemeClr val="lt1"/>
+          </a:fontRef>
+        </p:style>
+        <p:txBody>
+          <a:bodyPr rtlCol="0" anchor="ctr"/>
+          <a:lstStyle/>
+          <a:p>
+            <a:r>
+              <a:t>4</a:t>
+            </a:r>
+          </a:p>
+        </p:txBody>
+      </p:sp>
+      <p:sp>
+        <p:nvSpPr>
+          <p:cNvPr id="4" name="Rectangle 3"/>
+          <p:cNvSpPr/>
+          <p:nvPr/>
+        </p:nvSpPr>
+        <p:spPr>
+          <a:xfrm>
+            <a:off x="838200" y="365125"/>
+            <a:ext cx="10515600" cy="1325563"/>
+          </a:xfrm>
+          <a:prstGeom prst="rect">
+            <a:avLst/>
+          </a:prstGeom>
+        </p:spPr>
+        <p:style>
+          <a:lnRef idx="1">
+            <a:schemeClr val="accent1"/>
+          </a:lnRef>
+          <a:fillRef idx="3">
+            <a:schemeClr val="accent1"/>
+          </a:fillRef>
+          <a:effectRef idx="2">
+            <a:schemeClr val="accent1"/>
+          </a:effectRef>
+          <a:fontRef idx="minor">
+            <a:schemeClr val="lt1"/>
+          </a:fontRef>
+        </p:style>
+        <p:txBody>
+          <a:bodyPr rtlCol="0" anchor="ctr"/>
+          <a:lstStyle/>
+          <a:p>
+            <a:r>
+              <a:t>Atoms and Molecules Session 14</a:t>
+            </a:r>
+          </a:p>
+        </p:txBody>
+      </p:sp>
+      <p:pic>
+        <p:nvPicPr>
+          <p:cNvPr id="5" name="Picture 4" descr="image2.jpeg"/>
+          <p:cNvPicPr>
+            <a:picLocks noChangeAspect="1"/>
+          </p:cNvPicPr>
+          <p:nvPr/>
+        </p:nvPicPr>
+        <p:blipFill>
+          <a:blip r:embed="rId2"/>
+          <a:stretch>
+            <a:fillRect/>
+          </a:stretch>
+        </p:blipFill>
+        <p:spPr>
+          <a:xfrm>
+            <a:off x="1143000" y="1600199"/>
+            <a:ext cx="6934200" cy="4618179"/>
+          </a:xfrm>
+          <a:prstGeom prst="rect">
+            <a:avLst/>
+          </a:prstGeom>
+        </p:spPr>
+      </p:pic>
+      <p:sp>
+        <p:nvSpPr>
+          <p:cNvPr id="6" name="Rectangle 5"/>
+          <p:cNvSpPr/>
+          <p:nvPr/>
+        </p:nvSpPr>
+        <p:spPr>
+          <a:xfrm>
+            <a:off x="1143000" y="5943600"/>
+            <a:ext cx="6934200" cy="304800"/>
+          </a:xfrm>
+          <a:prstGeom prst="rect">
+            <a:avLst/>
+          </a:prstGeom>
+        </p:spPr>
+        <p:style>
+          <a:lnRef idx="1">
+            <a:schemeClr val="accent1"/>
+          </a:lnRef>
+          <a:fillRef idx="3">
+            <a:schemeClr val="accent1"/>
+          </a:fillRef>
+          <a:effectRef idx="2">
+            <a:schemeClr val="accent1"/>
+          </a:effectRef>
+          <a:fontRef idx="minor">
+            <a:schemeClr val="lt1"/>
+          </a:fontRef>
+        </p:style>
+        <p:txBody>
+          <a:bodyPr rtlCol="0" anchor="ctr"/>
+          <a:lstStyle/>
+          <a:p>
+            <a:pPr algn="ctr"/>
+          </a:p>
+        </p:txBody>
+      </p:sp>
     </p:spTree>
   </p:cSld>
   <p:clrMapOvr>
@@ -6196,6 +8360,45 @@
         </p:nvSpPr>
         <p:spPr>
           <a:xfrm>
+            <a:off x="838200" y="365125"/>
+            <a:ext cx="10515600" cy="1325563"/>
+          </a:xfrm>
+          <a:prstGeom prst="rect">
+            <a:avLst/>
+          </a:prstGeom>
+        </p:spPr>
+        <p:style>
+          <a:lnRef idx="1">
+            <a:schemeClr val="accent1"/>
+          </a:lnRef>
+          <a:fillRef idx="3">
+            <a:schemeClr val="accent1"/>
+          </a:fillRef>
+          <a:effectRef idx="2">
+            <a:schemeClr val="accent1"/>
+          </a:effectRef>
+          <a:fontRef idx="minor">
+            <a:schemeClr val="lt1"/>
+          </a:fontRef>
+        </p:style>
+        <p:txBody>
+          <a:bodyPr rtlCol="0" anchor="ctr"/>
+          <a:lstStyle/>
+          <a:p>
+            <a:r>
+              <a:t>Lab Safety Today</a:t>
+            </a:r>
+          </a:p>
+        </p:txBody>
+      </p:sp>
+      <p:sp>
+        <p:nvSpPr>
+          <p:cNvPr id="3" name="Rectangle 2"/>
+          <p:cNvSpPr/>
+          <p:nvPr/>
+        </p:nvSpPr>
+        <p:spPr>
+          <a:xfrm>
             <a:off x="155575" y="-144463"/>
             <a:ext cx="304800" cy="304801"/>
           </a:xfrm>
@@ -6227,7 +8430,7 @@
       </p:sp>
       <p:sp>
         <p:nvSpPr>
-          <p:cNvPr id="3" name="Rectangle 2"/>
+          <p:cNvPr id="4" name="Rectangle 3"/>
           <p:cNvSpPr/>
           <p:nvPr/>
         </p:nvSpPr>
@@ -6264,7 +8467,7 @@
       </p:sp>
       <p:sp>
         <p:nvSpPr>
-          <p:cNvPr id="4" name="Rectangle 3"/>
+          <p:cNvPr id="5" name="Rectangle 4"/>
           <p:cNvSpPr/>
           <p:nvPr/>
         </p:nvSpPr>
@@ -6301,7 +8504,7 @@
       </p:sp>
       <p:sp>
         <p:nvSpPr>
-          <p:cNvPr id="5" name="Rectangle 4"/>
+          <p:cNvPr id="6" name="Rectangle 5"/>
           <p:cNvSpPr/>
           <p:nvPr/>
         </p:nvSpPr>
@@ -6338,7 +8541,7 @@
       </p:sp>
       <p:sp>
         <p:nvSpPr>
-          <p:cNvPr id="6" name="Rectangle 5"/>
+          <p:cNvPr id="7" name="Rectangle 6"/>
           <p:cNvSpPr/>
           <p:nvPr/>
         </p:nvSpPr>
@@ -6375,7 +8578,7 @@
       </p:sp>
       <p:pic>
         <p:nvPicPr>
-          <p:cNvPr id="7" name="Picture 6" descr="image3.jpeg"/>
+          <p:cNvPr id="8" name="Picture 7" descr="image3.jpeg"/>
           <p:cNvPicPr>
             <a:picLocks noChangeAspect="1"/>
           </p:cNvPicPr>
@@ -6399,7 +8602,7 @@
       </p:pic>
       <p:pic>
         <p:nvPicPr>
-          <p:cNvPr id="8" name="Picture 7" descr="image4.jpeg"/>
+          <p:cNvPr id="9" name="Picture 8" descr="image4.jpeg"/>
           <p:cNvPicPr>
             <a:picLocks noChangeAspect="1"/>
           </p:cNvPicPr>
@@ -6423,7 +8626,7 @@
       </p:pic>
       <p:sp>
         <p:nvSpPr>
-          <p:cNvPr id="9" name="Rectangle 8"/>
+          <p:cNvPr id="10" name="Rectangle 9"/>
           <p:cNvSpPr/>
           <p:nvPr/>
         </p:nvSpPr>
@@ -6456,6 +8659,84 @@
           <a:p>
             <a:r>
               <a:t>We will be using a hot stove to make our rock candy solution. Let the adults do the cooking!Be careful with          your glass jars</a:t>
+            </a:r>
+          </a:p>
+        </p:txBody>
+      </p:sp>
+      <p:sp>
+        <p:nvSpPr>
+          <p:cNvPr id="11" name="Rectangle 10"/>
+          <p:cNvSpPr/>
+          <p:nvPr/>
+        </p:nvSpPr>
+        <p:spPr>
+          <a:xfrm>
+            <a:off x="838200" y="365125"/>
+            <a:ext cx="10515600" cy="1325563"/>
+          </a:xfrm>
+          <a:prstGeom prst="rect">
+            <a:avLst/>
+          </a:prstGeom>
+        </p:spPr>
+        <p:style>
+          <a:lnRef idx="1">
+            <a:schemeClr val="accent1"/>
+          </a:lnRef>
+          <a:fillRef idx="3">
+            <a:schemeClr val="accent1"/>
+          </a:fillRef>
+          <a:effectRef idx="2">
+            <a:schemeClr val="accent1"/>
+          </a:effectRef>
+          <a:fontRef idx="minor">
+            <a:schemeClr val="lt1"/>
+          </a:fontRef>
+        </p:style>
+        <p:txBody>
+          <a:bodyPr rtlCol="0" anchor="ctr"/>
+          <a:lstStyle/>
+          <a:p>
+            <a:r>
+              <a:t>5</a:t>
+            </a:r>
+          </a:p>
+        </p:txBody>
+      </p:sp>
+      <p:sp>
+        <p:nvSpPr>
+          <p:cNvPr id="12" name="Rectangle 11"/>
+          <p:cNvSpPr/>
+          <p:nvPr/>
+        </p:nvSpPr>
+        <p:spPr>
+          <a:xfrm>
+            <a:off x="838200" y="365125"/>
+            <a:ext cx="10515600" cy="1325563"/>
+          </a:xfrm>
+          <a:prstGeom prst="rect">
+            <a:avLst/>
+          </a:prstGeom>
+        </p:spPr>
+        <p:style>
+          <a:lnRef idx="1">
+            <a:schemeClr val="accent1"/>
+          </a:lnRef>
+          <a:fillRef idx="3">
+            <a:schemeClr val="accent1"/>
+          </a:fillRef>
+          <a:effectRef idx="2">
+            <a:schemeClr val="accent1"/>
+          </a:effectRef>
+          <a:fontRef idx="minor">
+            <a:schemeClr val="lt1"/>
+          </a:fontRef>
+        </p:style>
+        <p:txBody>
+          <a:bodyPr rtlCol="0" anchor="ctr"/>
+          <a:lstStyle/>
+          <a:p>
+            <a:r>
+              <a:t>Atoms and Molecules Session 14</a:t>
             </a:r>
           </a:p>
         </p:txBody>
@@ -6480,7 +8761,46 @@
       <p:grpSpPr/>
       <p:sp>
         <p:nvSpPr>
-          <p:cNvPr id="2" name="can 1"/>
+          <p:cNvPr id="2" name="Rectangle 1"/>
+          <p:cNvSpPr/>
+          <p:nvPr/>
+        </p:nvSpPr>
+        <p:spPr>
+          <a:xfrm>
+            <a:off x="838200" y="365125"/>
+            <a:ext cx="10515600" cy="1325563"/>
+          </a:xfrm>
+          <a:prstGeom prst="rect">
+            <a:avLst/>
+          </a:prstGeom>
+        </p:spPr>
+        <p:style>
+          <a:lnRef idx="1">
+            <a:schemeClr val="accent1"/>
+          </a:lnRef>
+          <a:fillRef idx="3">
+            <a:schemeClr val="accent1"/>
+          </a:fillRef>
+          <a:effectRef idx="2">
+            <a:schemeClr val="accent1"/>
+          </a:effectRef>
+          <a:fontRef idx="minor">
+            <a:schemeClr val="lt1"/>
+          </a:fontRef>
+        </p:style>
+        <p:txBody>
+          <a:bodyPr rtlCol="0" anchor="ctr"/>
+          <a:lstStyle/>
+          <a:p>
+            <a:r>
+              <a:t>Experiment 1: Growing Rock Candy Crystals That You Can Eat</a:t>
+            </a:r>
+          </a:p>
+        </p:txBody>
+      </p:sp>
+      <p:sp>
+        <p:nvSpPr>
+          <p:cNvPr id="3" name="can 2"/>
           <p:cNvSpPr/>
           <p:nvPr/>
         </p:nvSpPr>
@@ -6517,7 +8837,7 @@
       </p:sp>
       <p:pic>
         <p:nvPicPr>
-          <p:cNvPr id="3" name="Picture 2" descr="image5.png"/>
+          <p:cNvPr id="4" name="Picture 3" descr="image5.png"/>
           <p:cNvPicPr>
             <a:picLocks noChangeAspect="1"/>
           </p:cNvPicPr>
@@ -6541,7 +8861,7 @@
       </p:pic>
       <p:sp>
         <p:nvSpPr>
-          <p:cNvPr id="4" name="Rectangle 3"/>
+          <p:cNvPr id="5" name="Rectangle 4"/>
           <p:cNvSpPr/>
           <p:nvPr/>
         </p:nvSpPr>
@@ -6578,7 +8898,7 @@
       </p:sp>
       <p:sp>
         <p:nvSpPr>
-          <p:cNvPr id="5" name="Rectangle 4"/>
+          <p:cNvPr id="6" name="Rectangle 5"/>
           <p:cNvSpPr/>
           <p:nvPr/>
         </p:nvSpPr>
@@ -6613,36 +8933,6 @@
           </a:p>
         </p:txBody>
       </p:sp>
-      <p:cxnSp>
-        <p:nvCxnSpPr>
-          <p:cNvPr id="6" name="Connector 5"/>
-          <p:cNvCxnSpPr/>
-          <p:nvPr/>
-        </p:nvCxnSpPr>
-        <p:spPr>
-          <a:xfrm>
-            <a:off x="4572000" y="3224213"/>
-            <a:ext cx="1" cy="233362"/>
-          </a:xfrm>
-          <a:prstGeom prst="line">
-            <a:avLst/>
-          </a:prstGeom>
-        </p:spPr>
-        <p:style>
-          <a:lnRef idx="2">
-            <a:schemeClr val="accent1"/>
-          </a:lnRef>
-          <a:fillRef idx="0">
-            <a:schemeClr val="accent1"/>
-          </a:fillRef>
-          <a:effectRef idx="1">
-            <a:schemeClr val="accent1"/>
-          </a:effectRef>
-          <a:fontRef idx="minor">
-            <a:schemeClr val="tx1"/>
-          </a:fontRef>
-        </p:style>
-      </p:cxnSp>
       <p:cxnSp>
         <p:nvCxnSpPr>
           <p:cNvPr id="7" name="Connector 6"/>
@@ -6650,6 +8940,36 @@
           <p:nvPr/>
         </p:nvCxnSpPr>
         <p:spPr>
+          <a:xfrm>
+            <a:off x="4572000" y="3224213"/>
+            <a:ext cx="1" cy="233362"/>
+          </a:xfrm>
+          <a:prstGeom prst="line">
+            <a:avLst/>
+          </a:prstGeom>
+        </p:spPr>
+        <p:style>
+          <a:lnRef idx="2">
+            <a:schemeClr val="accent1"/>
+          </a:lnRef>
+          <a:fillRef idx="0">
+            <a:schemeClr val="accent1"/>
+          </a:fillRef>
+          <a:effectRef idx="1">
+            <a:schemeClr val="accent1"/>
+          </a:effectRef>
+          <a:fontRef idx="minor">
+            <a:schemeClr val="tx1"/>
+          </a:fontRef>
+        </p:style>
+      </p:cxnSp>
+      <p:cxnSp>
+        <p:nvCxnSpPr>
+          <p:cNvPr id="8" name="Connector 7"/>
+          <p:cNvCxnSpPr/>
+          <p:nvPr/>
+        </p:nvCxnSpPr>
+        <p:spPr>
           <a:xfrm flipH="1">
             <a:off x="4569619" y="3088481"/>
             <a:ext cx="2382" cy="50007"/>
@@ -6675,7 +8995,7 @@
       </p:cxnSp>
       <p:sp>
         <p:nvSpPr>
-          <p:cNvPr id="8" name="Rectangle 7"/>
+          <p:cNvPr id="9" name="Rectangle 8"/>
           <p:cNvSpPr/>
           <p:nvPr/>
         </p:nvSpPr>
@@ -6712,7 +9032,7 @@
       </p:sp>
       <p:sp>
         <p:nvSpPr>
-          <p:cNvPr id="9" name="Rectangle 8"/>
+          <p:cNvPr id="10" name="Rectangle 9"/>
           <p:cNvSpPr/>
           <p:nvPr/>
         </p:nvSpPr>
@@ -6749,7 +9069,7 @@
       </p:sp>
       <p:sp>
         <p:nvSpPr>
-          <p:cNvPr id="10" name="Rectangle 9"/>
+          <p:cNvPr id="11" name="Rectangle 10"/>
           <p:cNvSpPr/>
           <p:nvPr/>
         </p:nvSpPr>
@@ -6786,7 +9106,7 @@
       </p:sp>
       <p:sp>
         <p:nvSpPr>
-          <p:cNvPr id="11" name="Rectangle 10"/>
+          <p:cNvPr id="12" name="Rectangle 11"/>
           <p:cNvSpPr/>
           <p:nvPr/>
         </p:nvSpPr>
@@ -6823,7 +9143,7 @@
       </p:sp>
       <p:sp>
         <p:nvSpPr>
-          <p:cNvPr id="12" name="Rectangle 11"/>
+          <p:cNvPr id="13" name="Rectangle 12"/>
           <p:cNvSpPr/>
           <p:nvPr/>
         </p:nvSpPr>
@@ -6860,7 +9180,7 @@
       </p:sp>
       <p:sp>
         <p:nvSpPr>
-          <p:cNvPr id="13" name="Rectangle 12"/>
+          <p:cNvPr id="14" name="Rectangle 13"/>
           <p:cNvSpPr/>
           <p:nvPr/>
         </p:nvSpPr>
@@ -6897,7 +9217,7 @@
       </p:sp>
       <p:sp>
         <p:nvSpPr>
-          <p:cNvPr id="14" name="Rectangle 13"/>
+          <p:cNvPr id="15" name="Rectangle 14"/>
           <p:cNvSpPr/>
           <p:nvPr/>
         </p:nvSpPr>
@@ -6934,7 +9254,7 @@
       </p:sp>
       <p:sp>
         <p:nvSpPr>
-          <p:cNvPr id="15" name="Rectangle 14"/>
+          <p:cNvPr id="16" name="Rectangle 15"/>
           <p:cNvSpPr/>
           <p:nvPr/>
         </p:nvSpPr>
@@ -6971,7 +9291,7 @@
       </p:sp>
       <p:sp>
         <p:nvSpPr>
-          <p:cNvPr id="16" name="Rectangle 15"/>
+          <p:cNvPr id="17" name="Rectangle 16"/>
           <p:cNvSpPr/>
           <p:nvPr/>
         </p:nvSpPr>
@@ -7008,7 +9328,7 @@
       </p:sp>
       <p:sp>
         <p:nvSpPr>
-          <p:cNvPr id="17" name="Rectangle 16"/>
+          <p:cNvPr id="18" name="Rectangle 17"/>
           <p:cNvSpPr/>
           <p:nvPr/>
         </p:nvSpPr>
@@ -7045,7 +9365,7 @@
       </p:sp>
       <p:sp>
         <p:nvSpPr>
-          <p:cNvPr id="18" name="Rectangle 17"/>
+          <p:cNvPr id="19" name="Rectangle 18"/>
           <p:cNvSpPr/>
           <p:nvPr/>
         </p:nvSpPr>
@@ -7082,7 +9402,7 @@
       </p:sp>
       <p:sp>
         <p:nvSpPr>
-          <p:cNvPr id="19" name="Rectangle 18"/>
+          <p:cNvPr id="20" name="Rectangle 19"/>
           <p:cNvSpPr/>
           <p:nvPr/>
         </p:nvSpPr>
@@ -7119,7 +9439,7 @@
       </p:sp>
       <p:sp>
         <p:nvSpPr>
-          <p:cNvPr id="20" name="Rectangle 19"/>
+          <p:cNvPr id="21" name="Rectangle 20"/>
           <p:cNvSpPr/>
           <p:nvPr/>
         </p:nvSpPr>
@@ -7156,7 +9476,7 @@
       </p:sp>
       <p:sp>
         <p:nvSpPr>
-          <p:cNvPr id="21" name="Rectangle 20"/>
+          <p:cNvPr id="22" name="Rectangle 21"/>
           <p:cNvSpPr/>
           <p:nvPr/>
         </p:nvSpPr>
@@ -7193,7 +9513,7 @@
       </p:sp>
       <p:sp>
         <p:nvSpPr>
-          <p:cNvPr id="22" name="Rectangle 21"/>
+          <p:cNvPr id="23" name="Rectangle 22"/>
           <p:cNvSpPr/>
           <p:nvPr/>
         </p:nvSpPr>
@@ -7230,7 +9550,7 @@
       </p:sp>
       <p:sp>
         <p:nvSpPr>
-          <p:cNvPr id="23" name="Rectangle 22"/>
+          <p:cNvPr id="24" name="Rectangle 23"/>
           <p:cNvSpPr/>
           <p:nvPr/>
         </p:nvSpPr>
@@ -7269,7 +9589,7 @@
       </p:sp>
       <p:sp>
         <p:nvSpPr>
-          <p:cNvPr id="24" name="Rectangle 23"/>
+          <p:cNvPr id="25" name="Rectangle 24"/>
           <p:cNvSpPr/>
           <p:nvPr/>
         </p:nvSpPr>
@@ -7308,7 +9628,7 @@
       </p:sp>
       <p:sp>
         <p:nvSpPr>
-          <p:cNvPr id="25" name="Rectangle 24"/>
+          <p:cNvPr id="26" name="Rectangle 25"/>
           <p:cNvSpPr/>
           <p:nvPr/>
         </p:nvSpPr>
@@ -7347,7 +9667,7 @@
       </p:sp>
       <p:sp>
         <p:nvSpPr>
-          <p:cNvPr id="26" name="Rectangle 25"/>
+          <p:cNvPr id="27" name="Rectangle 26"/>
           <p:cNvSpPr/>
           <p:nvPr/>
         </p:nvSpPr>
@@ -7386,7 +9706,7 @@
       </p:sp>
       <p:sp>
         <p:nvSpPr>
-          <p:cNvPr id="27" name="Rectangle 26"/>
+          <p:cNvPr id="28" name="Rectangle 27"/>
           <p:cNvSpPr/>
           <p:nvPr/>
         </p:nvSpPr>
@@ -7425,7 +9745,7 @@
       </p:sp>
       <p:sp>
         <p:nvSpPr>
-          <p:cNvPr id="28" name="Rectangle 27"/>
+          <p:cNvPr id="29" name="Rectangle 28"/>
           <p:cNvSpPr/>
           <p:nvPr/>
         </p:nvSpPr>
@@ -7462,7 +9782,85 @@
       </p:sp>
       <p:sp>
         <p:nvSpPr>
-          <p:cNvPr id="29" name="Rectangle 28"/>
+          <p:cNvPr id="30" name="Rectangle 29"/>
+          <p:cNvSpPr/>
+          <p:nvPr/>
+        </p:nvSpPr>
+        <p:spPr>
+          <a:xfrm>
+            <a:off x="838200" y="365125"/>
+            <a:ext cx="10515600" cy="1325563"/>
+          </a:xfrm>
+          <a:prstGeom prst="rect">
+            <a:avLst/>
+          </a:prstGeom>
+        </p:spPr>
+        <p:style>
+          <a:lnRef idx="1">
+            <a:schemeClr val="accent1"/>
+          </a:lnRef>
+          <a:fillRef idx="3">
+            <a:schemeClr val="accent1"/>
+          </a:fillRef>
+          <a:effectRef idx="2">
+            <a:schemeClr val="accent1"/>
+          </a:effectRef>
+          <a:fontRef idx="minor">
+            <a:schemeClr val="lt1"/>
+          </a:fontRef>
+        </p:style>
+        <p:txBody>
+          <a:bodyPr rtlCol="0" anchor="ctr"/>
+          <a:lstStyle/>
+          <a:p>
+            <a:r>
+              <a:t>6</a:t>
+            </a:r>
+          </a:p>
+        </p:txBody>
+      </p:sp>
+      <p:sp>
+        <p:nvSpPr>
+          <p:cNvPr id="31" name="Rectangle 30"/>
+          <p:cNvSpPr/>
+          <p:nvPr/>
+        </p:nvSpPr>
+        <p:spPr>
+          <a:xfrm>
+            <a:off x="838200" y="365125"/>
+            <a:ext cx="10515600" cy="1325563"/>
+          </a:xfrm>
+          <a:prstGeom prst="rect">
+            <a:avLst/>
+          </a:prstGeom>
+        </p:spPr>
+        <p:style>
+          <a:lnRef idx="1">
+            <a:schemeClr val="accent1"/>
+          </a:lnRef>
+          <a:fillRef idx="3">
+            <a:schemeClr val="accent1"/>
+          </a:fillRef>
+          <a:effectRef idx="2">
+            <a:schemeClr val="accent1"/>
+          </a:effectRef>
+          <a:fontRef idx="minor">
+            <a:schemeClr val="lt1"/>
+          </a:fontRef>
+        </p:style>
+        <p:txBody>
+          <a:bodyPr rtlCol="0" anchor="ctr"/>
+          <a:lstStyle/>
+          <a:p>
+            <a:r>
+              <a:t>Atoms and Molecules Session 14</a:t>
+            </a:r>
+          </a:p>
+        </p:txBody>
+      </p:sp>
+      <p:sp>
+        <p:nvSpPr>
+          <p:cNvPr id="32" name="Rectangle 31"/>
           <p:cNvSpPr/>
           <p:nvPr/>
         </p:nvSpPr>
@@ -7499,7 +9897,7 @@
       </p:sp>
       <p:cxnSp>
         <p:nvCxnSpPr>
-          <p:cNvPr id="30" name="Connector 29"/>
+          <p:cNvPr id="33" name="Connector 32"/>
           <p:cNvCxnSpPr/>
           <p:nvPr/>
         </p:nvCxnSpPr>
@@ -7529,7 +9927,7 @@
       </p:cxnSp>
       <p:sp>
         <p:nvSpPr>
-          <p:cNvPr id="31" name="Rectangle 30"/>
+          <p:cNvPr id="34" name="Rectangle 33"/>
           <p:cNvSpPr/>
           <p:nvPr/>
         </p:nvSpPr>
@@ -7568,7 +9966,7 @@
       </p:sp>
       <p:pic>
         <p:nvPicPr>
-          <p:cNvPr id="32" name="Picture 31" descr="image6.png"/>
+          <p:cNvPr id="35" name="Picture 34" descr="image6.png"/>
           <p:cNvPicPr>
             <a:picLocks noChangeAspect="1"/>
           </p:cNvPicPr>
@@ -7592,7 +9990,7 @@
       </p:pic>
       <p:sp>
         <p:nvSpPr>
-          <p:cNvPr id="33" name="Rectangle 32"/>
+          <p:cNvPr id="36" name="Rectangle 35"/>
           <p:cNvSpPr/>
           <p:nvPr/>
         </p:nvSpPr>
@@ -7629,7 +10027,7 @@
       </p:sp>
       <p:sp>
         <p:nvSpPr>
-          <p:cNvPr id="34" name="Rectangle 33"/>
+          <p:cNvPr id="37" name="Rectangle 36"/>
           <p:cNvSpPr/>
           <p:nvPr/>
         </p:nvSpPr>
@@ -7723,6 +10121,84 @@
           </a:p>
         </p:txBody>
       </p:sp>
+      <p:sp>
+        <p:nvSpPr>
+          <p:cNvPr id="3" name="Rectangle 2"/>
+          <p:cNvSpPr/>
+          <p:nvPr/>
+        </p:nvSpPr>
+        <p:spPr>
+          <a:xfrm>
+            <a:off x="838200" y="365125"/>
+            <a:ext cx="10515600" cy="1325563"/>
+          </a:xfrm>
+          <a:prstGeom prst="rect">
+            <a:avLst/>
+          </a:prstGeom>
+        </p:spPr>
+        <p:style>
+          <a:lnRef idx="1">
+            <a:schemeClr val="accent1"/>
+          </a:lnRef>
+          <a:fillRef idx="3">
+            <a:schemeClr val="accent1"/>
+          </a:fillRef>
+          <a:effectRef idx="2">
+            <a:schemeClr val="accent1"/>
+          </a:effectRef>
+          <a:fontRef idx="minor">
+            <a:schemeClr val="lt1"/>
+          </a:fontRef>
+        </p:style>
+        <p:txBody>
+          <a:bodyPr rtlCol="0" anchor="ctr"/>
+          <a:lstStyle/>
+          <a:p>
+            <a:r>
+              <a:t>7</a:t>
+            </a:r>
+          </a:p>
+        </p:txBody>
+      </p:sp>
+      <p:sp>
+        <p:nvSpPr>
+          <p:cNvPr id="4" name="Rectangle 3"/>
+          <p:cNvSpPr/>
+          <p:nvPr/>
+        </p:nvSpPr>
+        <p:spPr>
+          <a:xfrm>
+            <a:off x="838200" y="365125"/>
+            <a:ext cx="10515600" cy="1325563"/>
+          </a:xfrm>
+          <a:prstGeom prst="rect">
+            <a:avLst/>
+          </a:prstGeom>
+        </p:spPr>
+        <p:style>
+          <a:lnRef idx="1">
+            <a:schemeClr val="accent1"/>
+          </a:lnRef>
+          <a:fillRef idx="3">
+            <a:schemeClr val="accent1"/>
+          </a:fillRef>
+          <a:effectRef idx="2">
+            <a:schemeClr val="accent1"/>
+          </a:effectRef>
+          <a:fontRef idx="minor">
+            <a:schemeClr val="lt1"/>
+          </a:fontRef>
+        </p:style>
+        <p:txBody>
+          <a:bodyPr rtlCol="0" anchor="ctr"/>
+          <a:lstStyle/>
+          <a:p>
+            <a:r>
+              <a:t>Atoms and Molecules Session 14</a:t>
+            </a:r>
+          </a:p>
+        </p:txBody>
+      </p:sp>
     </p:spTree>
   </p:cSld>
   <p:clrMapOvr>
@@ -7893,6 +10369,84 @@
           </a:p>
         </p:txBody>
       </p:sp>
+      <p:sp>
+        <p:nvSpPr>
+          <p:cNvPr id="6" name="Rectangle 5"/>
+          <p:cNvSpPr/>
+          <p:nvPr/>
+        </p:nvSpPr>
+        <p:spPr>
+          <a:xfrm>
+            <a:off x="838200" y="365125"/>
+            <a:ext cx="10515600" cy="1325563"/>
+          </a:xfrm>
+          <a:prstGeom prst="rect">
+            <a:avLst/>
+          </a:prstGeom>
+        </p:spPr>
+        <p:style>
+          <a:lnRef idx="1">
+            <a:schemeClr val="accent1"/>
+          </a:lnRef>
+          <a:fillRef idx="3">
+            <a:schemeClr val="accent1"/>
+          </a:fillRef>
+          <a:effectRef idx="2">
+            <a:schemeClr val="accent1"/>
+          </a:effectRef>
+          <a:fontRef idx="minor">
+            <a:schemeClr val="lt1"/>
+          </a:fontRef>
+        </p:style>
+        <p:txBody>
+          <a:bodyPr rtlCol="0" anchor="ctr"/>
+          <a:lstStyle/>
+          <a:p>
+            <a:r>
+              <a:t>8</a:t>
+            </a:r>
+          </a:p>
+        </p:txBody>
+      </p:sp>
+      <p:sp>
+        <p:nvSpPr>
+          <p:cNvPr id="7" name="Rectangle 6"/>
+          <p:cNvSpPr/>
+          <p:nvPr/>
+        </p:nvSpPr>
+        <p:spPr>
+          <a:xfrm>
+            <a:off x="838200" y="365125"/>
+            <a:ext cx="10515600" cy="1325563"/>
+          </a:xfrm>
+          <a:prstGeom prst="rect">
+            <a:avLst/>
+          </a:prstGeom>
+        </p:spPr>
+        <p:style>
+          <a:lnRef idx="1">
+            <a:schemeClr val="accent1"/>
+          </a:lnRef>
+          <a:fillRef idx="3">
+            <a:schemeClr val="accent1"/>
+          </a:fillRef>
+          <a:effectRef idx="2">
+            <a:schemeClr val="accent1"/>
+          </a:effectRef>
+          <a:fontRef idx="minor">
+            <a:schemeClr val="lt1"/>
+          </a:fontRef>
+        </p:style>
+        <p:txBody>
+          <a:bodyPr rtlCol="0" anchor="ctr"/>
+          <a:lstStyle/>
+          <a:p>
+            <a:r>
+              <a:t>Atoms and Molecules Session 14</a:t>
+            </a:r>
+          </a:p>
+        </p:txBody>
+      </p:sp>
     </p:spTree>
   </p:cSld>
   <p:clrMapOvr>
@@ -7919,6 +10473,45 @@
         </p:nvSpPr>
         <p:spPr>
           <a:xfrm>
+            <a:off x="838200" y="365125"/>
+            <a:ext cx="10515600" cy="1325563"/>
+          </a:xfrm>
+          <a:prstGeom prst="rect">
+            <a:avLst/>
+          </a:prstGeom>
+        </p:spPr>
+        <p:style>
+          <a:lnRef idx="1">
+            <a:schemeClr val="accent1"/>
+          </a:lnRef>
+          <a:fillRef idx="3">
+            <a:schemeClr val="accent1"/>
+          </a:fillRef>
+          <a:effectRef idx="2">
+            <a:schemeClr val="accent1"/>
+          </a:effectRef>
+          <a:fontRef idx="minor">
+            <a:schemeClr val="lt1"/>
+          </a:fontRef>
+        </p:style>
+        <p:txBody>
+          <a:bodyPr rtlCol="0" anchor="ctr"/>
+          <a:lstStyle/>
+          <a:p>
+            <a:r>
+              <a:t>Finishing Experiment 1</a:t>
+            </a:r>
+          </a:p>
+        </p:txBody>
+      </p:sp>
+      <p:sp>
+        <p:nvSpPr>
+          <p:cNvPr id="3" name="Rectangle 2"/>
+          <p:cNvSpPr/>
+          <p:nvPr/>
+        </p:nvSpPr>
+        <p:spPr>
+          <a:xfrm>
             <a:off x="457200" y="1390650"/>
             <a:ext cx="8305800" cy="4800600"/>
           </a:xfrm>
@@ -7946,6 +10539,84 @@
           <a:p>
             <a:r>
               <a:t>Tie one end of a 6-inch piece of string to the center of a clothespin and the other end to the end of a paper clip.Dip your string into the sugar solution.Roll your string in some sugar.Let the string cool down.Very Important: Shake off any extra sugar.Lower the string into the jar of hot sugar solution, resting the clothespin on the jar lid.Keep the bottom end of the paper clip a half inch or so above the bottom of the jar.Put jar in a safe, warm place and wait one week.Do not disturb the jar while you are waiting for the crystals to form.</a:t>
+            </a:r>
+          </a:p>
+        </p:txBody>
+      </p:sp>
+      <p:sp>
+        <p:nvSpPr>
+          <p:cNvPr id="4" name="Rectangle 3"/>
+          <p:cNvSpPr/>
+          <p:nvPr/>
+        </p:nvSpPr>
+        <p:spPr>
+          <a:xfrm>
+            <a:off x="838200" y="365125"/>
+            <a:ext cx="10515600" cy="1325563"/>
+          </a:xfrm>
+          <a:prstGeom prst="rect">
+            <a:avLst/>
+          </a:prstGeom>
+        </p:spPr>
+        <p:style>
+          <a:lnRef idx="1">
+            <a:schemeClr val="accent1"/>
+          </a:lnRef>
+          <a:fillRef idx="3">
+            <a:schemeClr val="accent1"/>
+          </a:fillRef>
+          <a:effectRef idx="2">
+            <a:schemeClr val="accent1"/>
+          </a:effectRef>
+          <a:fontRef idx="minor">
+            <a:schemeClr val="lt1"/>
+          </a:fontRef>
+        </p:style>
+        <p:txBody>
+          <a:bodyPr rtlCol="0" anchor="ctr"/>
+          <a:lstStyle/>
+          <a:p>
+            <a:r>
+              <a:t>9</a:t>
+            </a:r>
+          </a:p>
+        </p:txBody>
+      </p:sp>
+      <p:sp>
+        <p:nvSpPr>
+          <p:cNvPr id="5" name="Rectangle 4"/>
+          <p:cNvSpPr/>
+          <p:nvPr/>
+        </p:nvSpPr>
+        <p:spPr>
+          <a:xfrm>
+            <a:off x="838200" y="365125"/>
+            <a:ext cx="10515600" cy="1325563"/>
+          </a:xfrm>
+          <a:prstGeom prst="rect">
+            <a:avLst/>
+          </a:prstGeom>
+        </p:spPr>
+        <p:style>
+          <a:lnRef idx="1">
+            <a:schemeClr val="accent1"/>
+          </a:lnRef>
+          <a:fillRef idx="3">
+            <a:schemeClr val="accent1"/>
+          </a:fillRef>
+          <a:effectRef idx="2">
+            <a:schemeClr val="accent1"/>
+          </a:effectRef>
+          <a:fontRef idx="minor">
+            <a:schemeClr val="lt1"/>
+          </a:fontRef>
+        </p:style>
+        <p:txBody>
+          <a:bodyPr rtlCol="0" anchor="ctr"/>
+          <a:lstStyle/>
+          <a:p>
+            <a:r>
+              <a:t>Atoms and Molecules Session 14</a:t>
             </a:r>
           </a:p>
         </p:txBody>
